--- a/ppt/IoTAI31-FPGA.pptx
+++ b/ppt/IoTAI31-FPGA.pptx
@@ -5,30 +5,36 @@
     <p:sldMasterId id="2147483653" r:id="rId1"/>
   </p:sldMasterIdLst>
   <p:notesMasterIdLst>
-    <p:notesMasterId r:id="rId20"/>
+    <p:notesMasterId r:id="rId26"/>
   </p:notesMasterIdLst>
   <p:handoutMasterIdLst>
-    <p:handoutMasterId r:id="rId21"/>
+    <p:handoutMasterId r:id="rId27"/>
   </p:handoutMasterIdLst>
   <p:sldIdLst>
     <p:sldId id="264" r:id="rId2"/>
-    <p:sldId id="293" r:id="rId3"/>
-    <p:sldId id="294" r:id="rId4"/>
-    <p:sldId id="266" r:id="rId5"/>
-    <p:sldId id="295" r:id="rId6"/>
-    <p:sldId id="298" r:id="rId7"/>
-    <p:sldId id="296" r:id="rId8"/>
-    <p:sldId id="299" r:id="rId9"/>
-    <p:sldId id="300" r:id="rId10"/>
-    <p:sldId id="297" r:id="rId11"/>
-    <p:sldId id="304" r:id="rId12"/>
-    <p:sldId id="301" r:id="rId13"/>
-    <p:sldId id="302" r:id="rId14"/>
-    <p:sldId id="303" r:id="rId15"/>
-    <p:sldId id="306" r:id="rId16"/>
-    <p:sldId id="307" r:id="rId17"/>
-    <p:sldId id="289" r:id="rId18"/>
-    <p:sldId id="308" r:id="rId19"/>
+    <p:sldId id="283" r:id="rId3"/>
+    <p:sldId id="269" r:id="rId4"/>
+    <p:sldId id="284" r:id="rId5"/>
+    <p:sldId id="285" r:id="rId6"/>
+    <p:sldId id="277" r:id="rId7"/>
+    <p:sldId id="275" r:id="rId8"/>
+    <p:sldId id="274" r:id="rId9"/>
+    <p:sldId id="276" r:id="rId10"/>
+    <p:sldId id="278" r:id="rId11"/>
+    <p:sldId id="270" r:id="rId12"/>
+    <p:sldId id="273" r:id="rId13"/>
+    <p:sldId id="271" r:id="rId14"/>
+    <p:sldId id="281" r:id="rId15"/>
+    <p:sldId id="279" r:id="rId16"/>
+    <p:sldId id="280" r:id="rId17"/>
+    <p:sldId id="282" r:id="rId18"/>
+    <p:sldId id="272" r:id="rId19"/>
+    <p:sldId id="286" r:id="rId20"/>
+    <p:sldId id="287" r:id="rId21"/>
+    <p:sldId id="265" r:id="rId22"/>
+    <p:sldId id="266" r:id="rId23"/>
+    <p:sldId id="267" r:id="rId24"/>
+    <p:sldId id="268" r:id="rId25"/>
   </p:sldIdLst>
   <p:sldSz cx="9144000" cy="6858000" type="screen4x3"/>
   <p:notesSz cx="6648450" cy="9782175"/>
@@ -3687,10 +3693,9 @@
           <a:p>
             <a:pPr eaLnBrk="1" hangingPunct="1"/>
             <a:r>
-              <a:rPr lang="fr-FR" altLang="fr-FR" dirty="0" err="1"/>
-              <a:t>ExecuTorch</a:t>
-            </a:r>
-            <a:endParaRPr lang="fr-FR" altLang="fr-FR" dirty="0"/>
+              <a:rPr lang="fr-FR" altLang="fr-FR" dirty="0"/>
+              <a:t>FPGA</a:t>
+            </a:r>
           </a:p>
         </p:txBody>
       </p:sp>
@@ -3727,36 +3732,6 @@
           </a:p>
         </p:txBody>
       </p:sp>
-      <p:pic>
-        <p:nvPicPr>
-          <p:cNvPr id="4" name="Image 3">
-            <a:extLst>
-              <a:ext uri="{FF2B5EF4-FFF2-40B4-BE49-F238E27FC236}">
-                <a16:creationId xmlns:a16="http://schemas.microsoft.com/office/drawing/2014/main" id="{49151C95-BFF1-4B41-2CAD-9CE29EBB0C0D}"/>
-              </a:ext>
-            </a:extLst>
-          </p:cNvPr>
-          <p:cNvPicPr>
-            <a:picLocks noChangeAspect="1"/>
-          </p:cNvPicPr>
-          <p:nvPr/>
-        </p:nvPicPr>
-        <p:blipFill>
-          <a:blip r:embed="rId2"/>
-          <a:stretch>
-            <a:fillRect/>
-          </a:stretch>
-        </p:blipFill>
-        <p:spPr>
-          <a:xfrm>
-            <a:off x="3630848" y="4437112"/>
-            <a:ext cx="1882303" cy="1988992"/>
-          </a:xfrm>
-          <a:prstGeom prst="rect">
-            <a:avLst/>
-          </a:prstGeom>
-        </p:spPr>
-      </p:pic>
     </p:spTree>
   </p:cSld>
   <p:clrMapOvr>
@@ -3787,7 +3762,7 @@
           <p:cNvPr id="2" name="Titre 1">
             <a:extLst>
               <a:ext uri="{FF2B5EF4-FFF2-40B4-BE49-F238E27FC236}">
-                <a16:creationId xmlns:a16="http://schemas.microsoft.com/office/drawing/2014/main" id="{739299C7-45F1-CB31-0C77-60B208C9F4CA}"/>
+                <a16:creationId xmlns:a16="http://schemas.microsoft.com/office/drawing/2014/main" id="{8F90C60C-A2CA-F6BD-0F4C-DBC9818D71FC}"/>
               </a:ext>
             </a:extLst>
           </p:cNvPr>
@@ -3805,7 +3780,7 @@
           <a:p>
             <a:r>
               <a:rPr lang="fr-FR" dirty="0"/>
-              <a:t>Performances</a:t>
+              <a:t>HLC C++</a:t>
             </a:r>
           </a:p>
         </p:txBody>
@@ -3815,7 +3790,7 @@
           <p:cNvPr id="3" name="Espace réservé du contenu 2">
             <a:extLst>
               <a:ext uri="{FF2B5EF4-FFF2-40B4-BE49-F238E27FC236}">
-                <a16:creationId xmlns:a16="http://schemas.microsoft.com/office/drawing/2014/main" id="{1107D6C1-ECDF-54DE-2F7E-342C74572A72}"/>
+                <a16:creationId xmlns:a16="http://schemas.microsoft.com/office/drawing/2014/main" id="{1653B0FE-6C2B-5330-C2A0-35089F1A3BC1}"/>
               </a:ext>
             </a:extLst>
           </p:cNvPr>
@@ -3833,21 +3808,89 @@
           <a:p>
             <a:r>
               <a:rPr lang="fr-FR" dirty="0"/>
-              <a:t>Hautes performances, avec accélération matérielle et optimisation du modèle</a:t>
-            </a:r>
-          </a:p>
-          <a:p>
-            <a:r>
-              <a:rPr lang="fr-FR" dirty="0"/>
-              <a:t>Compatible GPU, NPU &amp; DSP</a:t>
-            </a:r>
-          </a:p>
-        </p:txBody>
-      </p:sp>
+              <a:t>Les </a:t>
+            </a:r>
+            <a:r>
+              <a:rPr lang="fr-FR" dirty="0" err="1"/>
+              <a:t>frameworks</a:t>
+            </a:r>
+            <a:r>
+              <a:rPr lang="fr-FR" dirty="0"/>
+              <a:t> HLS sont souvent basés sur du C++ ou du Python</a:t>
+            </a:r>
+          </a:p>
+          <a:p>
+            <a:r>
+              <a:rPr lang="fr-FR" dirty="0"/>
+              <a:t>Il est donc facile de convertir un modèle </a:t>
+            </a:r>
+            <a:r>
+              <a:rPr lang="fr-FR" dirty="0" err="1"/>
+              <a:t>RandomForest</a:t>
+            </a:r>
+            <a:r>
+              <a:rPr lang="fr-FR" dirty="0"/>
+              <a:t> .h en HLS</a:t>
+            </a:r>
+          </a:p>
+          <a:p>
+            <a:r>
+              <a:rPr lang="fr-FR" dirty="0"/>
+              <a:t>Des outils comme </a:t>
+            </a:r>
+            <a:r>
+              <a:rPr lang="fr-FR" dirty="0" err="1"/>
+              <a:t>Vivado</a:t>
+            </a:r>
+            <a:r>
+              <a:rPr lang="fr-FR" dirty="0"/>
+              <a:t> HML ou Vitis HLS vont ensuite convertir le HLS en VHDL ou </a:t>
+            </a:r>
+            <a:r>
+              <a:rPr lang="fr-FR" dirty="0" err="1"/>
+              <a:t>Verilog</a:t>
+            </a:r>
+            <a:endParaRPr lang="fr-FR" dirty="0"/>
+          </a:p>
+          <a:p>
+            <a:endParaRPr lang="fr-FR" dirty="0"/>
+          </a:p>
+        </p:txBody>
+      </p:sp>
+      <p:pic>
+        <p:nvPicPr>
+          <p:cNvPr id="4" name="Image 3" descr="logo2">
+            <a:extLst>
+              <a:ext uri="{FF2B5EF4-FFF2-40B4-BE49-F238E27FC236}">
+                <a16:creationId xmlns:a16="http://schemas.microsoft.com/office/drawing/2014/main" id="{1FC0057C-CC9A-6294-FCA0-ECDEB86A8712}"/>
+              </a:ext>
+            </a:extLst>
+          </p:cNvPr>
+          <p:cNvPicPr>
+            <a:picLocks noChangeAspect="1"/>
+          </p:cNvPicPr>
+          <p:nvPr/>
+        </p:nvPicPr>
+        <p:blipFill>
+          <a:blip r:embed="rId2"/>
+          <a:stretch>
+            <a:fillRect/>
+          </a:stretch>
+        </p:blipFill>
+        <p:spPr>
+          <a:xfrm>
+            <a:off x="3131840" y="4869160"/>
+            <a:ext cx="2091358" cy="987121"/>
+          </a:xfrm>
+          <a:prstGeom prst="rect">
+            <a:avLst/>
+          </a:prstGeom>
+        </p:spPr>
+      </p:pic>
     </p:spTree>
     <p:extLst>
       <p:ext uri="{BB962C8B-B14F-4D97-AF65-F5344CB8AC3E}">
-        <p14:creationId xmlns:p14="http://schemas.microsoft.com/office/powerpoint/2010/main" val="2582337845"/>
+        <p14:creationId xmlns:p14="http://schemas.microsoft.com/office/powerpoint/2010/main" val="601836140"/>
       </p:ext>
     </p:extLst>
   </p:cSld>
@@ -3879,7 +3922,7 @@
           <p:cNvPr id="2" name="Titre 1">
             <a:extLst>
               <a:ext uri="{FF2B5EF4-FFF2-40B4-BE49-F238E27FC236}">
-                <a16:creationId xmlns:a16="http://schemas.microsoft.com/office/drawing/2014/main" id="{D60E1EF0-2338-E50F-9B62-EB98A35EB5CF}"/>
+                <a16:creationId xmlns:a16="http://schemas.microsoft.com/office/drawing/2014/main" id="{15D20693-1A54-CC2E-18D7-5573119B7D77}"/>
               </a:ext>
             </a:extLst>
           </p:cNvPr>
@@ -3896,18 +3939,9 @@
           <a:lstStyle/>
           <a:p>
             <a:r>
-              <a:rPr lang="fr-FR" dirty="0" err="1"/>
-              <a:t>PyTorch</a:t>
-            </a:r>
-            <a:r>
-              <a:rPr lang="fr-FR" dirty="0"/>
-              <a:t> </a:t>
-            </a:r>
-            <a:r>
-              <a:rPr lang="fr-FR" dirty="0" err="1"/>
-              <a:t>Embeded</a:t>
-            </a:r>
-            <a:endParaRPr lang="fr-FR" dirty="0"/>
+              <a:rPr lang="fr-FR" dirty="0"/>
+              <a:t>HLS4ML</a:t>
+            </a:r>
           </a:p>
         </p:txBody>
       </p:sp>
@@ -3916,7 +3950,7 @@
           <p:cNvPr id="3" name="Espace réservé du contenu 2">
             <a:extLst>
               <a:ext uri="{FF2B5EF4-FFF2-40B4-BE49-F238E27FC236}">
-                <a16:creationId xmlns:a16="http://schemas.microsoft.com/office/drawing/2014/main" id="{756C52CF-574A-BAF7-520C-F55D7FB344DC}"/>
+                <a16:creationId xmlns:a16="http://schemas.microsoft.com/office/drawing/2014/main" id="{02FDB766-071A-53A5-13FA-E71592796571}"/>
               </a:ext>
             </a:extLst>
           </p:cNvPr>
@@ -3933,65 +3967,81 @@
           <a:lstStyle/>
           <a:p>
             <a:r>
+              <a:rPr lang="fr-FR" dirty="0"/>
+              <a:t>hls4ml est un package pour l’inférence en ML sur FPGA</a:t>
+            </a:r>
+          </a:p>
+          <a:p>
+            <a:r>
+              <a:rPr lang="fr-FR" dirty="0"/>
+              <a:t>Il créé des </a:t>
+            </a:r>
+            <a:r>
               <a:rPr lang="fr-FR" dirty="0" err="1"/>
-              <a:t>ExecuTorch</a:t>
-            </a:r>
-            <a:r>
-              <a:rPr lang="fr-FR" dirty="0"/>
-              <a:t> s'appuie sur des plateformes pour générer le PTE</a:t>
+              <a:t>firmwares</a:t>
+            </a:r>
+            <a:r>
+              <a:rPr lang="fr-FR" dirty="0"/>
+              <a:t> de modèles de ML en utilisant un langage de synthèse de haut niveau</a:t>
             </a:r>
           </a:p>
           <a:p>
             <a:pPr lvl="1"/>
             <a:r>
-              <a:rPr lang="fr-FR" dirty="0" err="1"/>
-              <a:t>PyTorch</a:t>
-            </a:r>
-            <a:r>
-              <a:rPr lang="fr-FR" dirty="0"/>
-              <a:t> </a:t>
-            </a:r>
-            <a:r>
-              <a:rPr lang="fr-FR" dirty="0" err="1"/>
-              <a:t>Embeded</a:t>
-            </a:r>
-            <a:endParaRPr lang="fr-FR" dirty="0"/>
-          </a:p>
-          <a:p>
-            <a:r>
-              <a:rPr lang="fr-FR" dirty="0" err="1"/>
-              <a:t>Quantisation</a:t>
-            </a:r>
-            <a:r>
-              <a:rPr lang="fr-FR" dirty="0"/>
-              <a:t> disponible</a:t>
+              <a:rPr lang="fr-FR" dirty="0"/>
+              <a:t>HLS</a:t>
             </a:r>
           </a:p>
           <a:p>
             <a:pPr lvl="1"/>
             <a:r>
               <a:rPr lang="fr-FR" dirty="0"/>
-              <a:t>En FP32 ne nécessite aucune plateforme côté serveur</a:t>
+              <a:t>HLS4ML est compatible TF et PT</a:t>
             </a:r>
           </a:p>
           <a:p>
             <a:pPr lvl="1"/>
             <a:r>
               <a:rPr lang="fr-FR" dirty="0"/>
-              <a:t>Nécessite alors une plateforme pour la </a:t>
-            </a:r>
-            <a:r>
-              <a:rPr lang="fr-FR" dirty="0" err="1"/>
-              <a:t>quantisation</a:t>
-            </a:r>
-            <a:endParaRPr lang="fr-FR" dirty="0"/>
-          </a:p>
-        </p:txBody>
-      </p:sp>
+              <a:t>Conversion en HLS configurables</a:t>
+            </a:r>
+          </a:p>
+        </p:txBody>
+      </p:sp>
+      <p:pic>
+        <p:nvPicPr>
+          <p:cNvPr id="5" name="Image 4">
+            <a:extLst>
+              <a:ext uri="{FF2B5EF4-FFF2-40B4-BE49-F238E27FC236}">
+                <a16:creationId xmlns:a16="http://schemas.microsoft.com/office/drawing/2014/main" id="{7064C03A-76D3-28FF-3821-6E1EA37EE471}"/>
+              </a:ext>
+            </a:extLst>
+          </p:cNvPr>
+          <p:cNvPicPr>
+            <a:picLocks noChangeAspect="1"/>
+          </p:cNvPicPr>
+          <p:nvPr/>
+        </p:nvPicPr>
+        <p:blipFill>
+          <a:blip r:embed="rId2"/>
+          <a:stretch>
+            <a:fillRect/>
+          </a:stretch>
+        </p:blipFill>
+        <p:spPr>
+          <a:xfrm>
+            <a:off x="3275856" y="0"/>
+            <a:ext cx="2879629" cy="1268802"/>
+          </a:xfrm>
+          <a:prstGeom prst="rect">
+            <a:avLst/>
+          </a:prstGeom>
+        </p:spPr>
+      </p:pic>
     </p:spTree>
     <p:extLst>
       <p:ext uri="{BB962C8B-B14F-4D97-AF65-F5344CB8AC3E}">
-        <p14:creationId xmlns:p14="http://schemas.microsoft.com/office/powerpoint/2010/main" val="4034148337"/>
+        <p14:creationId xmlns:p14="http://schemas.microsoft.com/office/powerpoint/2010/main" val="2618839921"/>
       </p:ext>
     </p:extLst>
   </p:cSld>
@@ -4006,7 +4056,13 @@
   <p:cSld>
     <p:spTree>
       <p:nvGrpSpPr>
-        <p:cNvPr id="1" name=""/>
+        <p:cNvPr id="1" name="">
+          <a:extLst>
+            <a:ext uri="{FF2B5EF4-FFF2-40B4-BE49-F238E27FC236}">
+              <a16:creationId xmlns:a16="http://schemas.microsoft.com/office/drawing/2014/main" id="{7B5F28F4-FA99-EADB-6660-80F56D35F910}"/>
+            </a:ext>
+          </a:extLst>
+        </p:cNvPr>
         <p:cNvGrpSpPr/>
         <p:nvPr/>
       </p:nvGrpSpPr>
@@ -4023,7 +4079,7 @@
           <p:cNvPr id="2" name="Titre 1">
             <a:extLst>
               <a:ext uri="{FF2B5EF4-FFF2-40B4-BE49-F238E27FC236}">
-                <a16:creationId xmlns:a16="http://schemas.microsoft.com/office/drawing/2014/main" id="{5D3F9E29-4F03-7E8B-79C7-7BAC642ED423}"/>
+                <a16:creationId xmlns:a16="http://schemas.microsoft.com/office/drawing/2014/main" id="{6AA0E6D3-BB18-2CED-FEAF-272B0D8E77C3}"/>
               </a:ext>
             </a:extLst>
           </p:cNvPr>
@@ -4040,10 +4096,9 @@
           <a:lstStyle/>
           <a:p>
             <a:r>
-              <a:rPr lang="fr-FR" dirty="0" err="1"/>
-              <a:t>XNNPack</a:t>
-            </a:r>
-            <a:endParaRPr lang="fr-FR" dirty="0"/>
+              <a:rPr lang="fr-FR" dirty="0"/>
+              <a:t>HLS4ML</a:t>
+            </a:r>
           </a:p>
         </p:txBody>
       </p:sp>
@@ -4052,7 +4107,7 @@
           <p:cNvPr id="3" name="Espace réservé du contenu 2">
             <a:extLst>
               <a:ext uri="{FF2B5EF4-FFF2-40B4-BE49-F238E27FC236}">
-                <a16:creationId xmlns:a16="http://schemas.microsoft.com/office/drawing/2014/main" id="{ACE5833A-3426-2692-778F-2704CDF8688C}"/>
+                <a16:creationId xmlns:a16="http://schemas.microsoft.com/office/drawing/2014/main" id="{C7CD6FD9-11FB-F77F-880F-79F8682DE953}"/>
               </a:ext>
             </a:extLst>
           </p:cNvPr>
@@ -4068,96 +4123,83 @@
           <a:bodyPr/>
           <a:lstStyle/>
           <a:p>
-            <a:r>
-              <a:rPr lang="fr-FR" dirty="0"/>
-              <a:t>Google XNNPACK est une solution hautement optimisée pour l’inférence de réseaux de neurones sur les plateformes ARM, x86, </a:t>
-            </a:r>
-            <a:r>
-              <a:rPr lang="fr-FR" dirty="0" err="1"/>
-              <a:t>WebAssembly</a:t>
-            </a:r>
-            <a:r>
-              <a:rPr lang="fr-FR" dirty="0"/>
-              <a:t> et RISC-V</a:t>
-            </a:r>
-          </a:p>
-          <a:p>
-            <a:pPr lvl="1"/>
-            <a:r>
-              <a:rPr lang="fr-FR" dirty="0"/>
-              <a:t>XNNPACK n’est pas destinée à être utilisée directement par les développeurs, elle fournit plutôt des primitives de bas niveau pour accélérer des </a:t>
-            </a:r>
-            <a:r>
-              <a:rPr lang="fr-FR" dirty="0" err="1"/>
-              <a:t>frameworks</a:t>
-            </a:r>
-            <a:r>
-              <a:rPr lang="fr-FR" dirty="0"/>
-              <a:t> de machine </a:t>
-            </a:r>
-            <a:r>
-              <a:rPr lang="fr-FR" dirty="0" err="1"/>
-              <a:t>learning</a:t>
-            </a:r>
-            <a:r>
-              <a:rPr lang="fr-FR" dirty="0"/>
-              <a:t> de haut niveau</a:t>
-            </a:r>
-          </a:p>
-          <a:p>
-            <a:pPr lvl="1"/>
-            <a:r>
-              <a:rPr lang="fr-FR" dirty="0"/>
-              <a:t>Compatible </a:t>
-            </a:r>
-            <a:r>
-              <a:rPr lang="fr-FR" dirty="0" err="1"/>
-              <a:t>TensorFlow</a:t>
-            </a:r>
-            <a:r>
-              <a:rPr lang="fr-FR" dirty="0"/>
-              <a:t> Lite, TensorFlow.js, </a:t>
-            </a:r>
-            <a:r>
-              <a:rPr lang="fr-FR" dirty="0" err="1"/>
-              <a:t>PyTorch</a:t>
-            </a:r>
-            <a:r>
-              <a:rPr lang="fr-FR" dirty="0"/>
-              <a:t>, ONNX Runtime, </a:t>
-            </a:r>
-            <a:r>
-              <a:rPr lang="fr-FR" dirty="0" err="1"/>
-              <a:t>ExecuTorch</a:t>
-            </a:r>
-            <a:r>
-              <a:rPr lang="fr-FR" dirty="0"/>
-              <a:t> et </a:t>
-            </a:r>
-            <a:r>
-              <a:rPr lang="fr-FR" dirty="0" err="1"/>
-              <a:t>MediaPipe</a:t>
-            </a:r>
-            <a:endParaRPr lang="fr-FR" dirty="0"/>
-          </a:p>
-          <a:p>
-            <a:pPr lvl="1"/>
-            <a:r>
-              <a:rPr lang="fr-FR" dirty="0"/>
-              <a:t>C'est une des plateformes </a:t>
-            </a:r>
-            <a:r>
-              <a:rPr lang="fr-FR" dirty="0" err="1"/>
-              <a:t>ExecuTorch</a:t>
-            </a:r>
-            <a:endParaRPr lang="fr-FR" dirty="0"/>
-          </a:p>
-        </p:txBody>
-      </p:sp>
+            <a:pPr fontAlgn="t"/>
+            <a:r>
+              <a:rPr lang="fr-FR" dirty="0"/>
+              <a:t>hls4ml est conçu pour une inférence à très faible latence sur FPGA</a:t>
+            </a:r>
+          </a:p>
+          <a:p>
+            <a:pPr fontAlgn="t"/>
+            <a:r>
+              <a:rPr lang="fr-FR" dirty="0"/>
+              <a:t>Cas d’usage</a:t>
+            </a:r>
+          </a:p>
+          <a:p>
+            <a:pPr lvl="1" fontAlgn="t"/>
+            <a:r>
+              <a:rPr lang="fr-FR" dirty="0"/>
+              <a:t>systèmes de contrôle pour le calcul quantique</a:t>
+            </a:r>
+          </a:p>
+          <a:p>
+            <a:pPr lvl="1" fontAlgn="t"/>
+            <a:r>
+              <a:rPr lang="fr-FR" dirty="0"/>
+              <a:t>boucles de rétroaction en fusion nucléaire</a:t>
+            </a:r>
+          </a:p>
+          <a:p>
+            <a:pPr lvl="1" fontAlgn="t"/>
+            <a:r>
+              <a:rPr lang="fr-FR" dirty="0"/>
+              <a:t>monitoring environnemental basse consommation sur satellites</a:t>
+            </a:r>
+          </a:p>
+          <a:p>
+            <a:pPr lvl="1" fontAlgn="t"/>
+            <a:r>
+              <a:rPr lang="fr-FR" dirty="0"/>
+              <a:t>traitement de signaux biomédicaux (par exemple classification d’arythmies)</a:t>
+            </a:r>
+          </a:p>
+        </p:txBody>
+      </p:sp>
+      <p:pic>
+        <p:nvPicPr>
+          <p:cNvPr id="5" name="Image 4">
+            <a:extLst>
+              <a:ext uri="{FF2B5EF4-FFF2-40B4-BE49-F238E27FC236}">
+                <a16:creationId xmlns:a16="http://schemas.microsoft.com/office/drawing/2014/main" id="{685F43EE-18E2-E433-D9BC-3D9BB4BA25CC}"/>
+              </a:ext>
+            </a:extLst>
+          </p:cNvPr>
+          <p:cNvPicPr>
+            <a:picLocks noChangeAspect="1"/>
+          </p:cNvPicPr>
+          <p:nvPr/>
+        </p:nvPicPr>
+        <p:blipFill>
+          <a:blip r:embed="rId2"/>
+          <a:stretch>
+            <a:fillRect/>
+          </a:stretch>
+        </p:blipFill>
+        <p:spPr>
+          <a:xfrm>
+            <a:off x="3275856" y="0"/>
+            <a:ext cx="2879629" cy="1268802"/>
+          </a:xfrm>
+          <a:prstGeom prst="rect">
+            <a:avLst/>
+          </a:prstGeom>
+        </p:spPr>
+      </p:pic>
     </p:spTree>
     <p:extLst>
       <p:ext uri="{BB962C8B-B14F-4D97-AF65-F5344CB8AC3E}">
-        <p14:creationId xmlns:p14="http://schemas.microsoft.com/office/powerpoint/2010/main" val="3484178256"/>
+        <p14:creationId xmlns:p14="http://schemas.microsoft.com/office/powerpoint/2010/main" val="1299732345"/>
       </p:ext>
     </p:extLst>
   </p:cSld>
@@ -4189,7 +4231,7 @@
           <p:cNvPr id="2" name="Titre 1">
             <a:extLst>
               <a:ext uri="{FF2B5EF4-FFF2-40B4-BE49-F238E27FC236}">
-                <a16:creationId xmlns:a16="http://schemas.microsoft.com/office/drawing/2014/main" id="{F8FC5CA7-BF45-B2D7-B9F6-AEB7DD3AE8A5}"/>
+                <a16:creationId xmlns:a16="http://schemas.microsoft.com/office/drawing/2014/main" id="{8F43866F-03C3-0233-D3C2-EA72B3D1BCA2}"/>
               </a:ext>
             </a:extLst>
           </p:cNvPr>
@@ -4205,29 +4247,51 @@
           <a:bodyPr/>
           <a:lstStyle/>
           <a:p>
-            <a:r>
-              <a:rPr lang="fr-FR" dirty="0" err="1"/>
-              <a:t>XNNPack</a:t>
-            </a:r>
             <a:endParaRPr lang="fr-FR" dirty="0"/>
+          </a:p>
+        </p:txBody>
+      </p:sp>
+      <p:sp>
+        <p:nvSpPr>
+          <p:cNvPr id="3" name="Espace réservé du contenu 2">
+            <a:extLst>
+              <a:ext uri="{FF2B5EF4-FFF2-40B4-BE49-F238E27FC236}">
+                <a16:creationId xmlns:a16="http://schemas.microsoft.com/office/drawing/2014/main" id="{E7687291-3602-2D8C-58C6-6EF02413C898}"/>
+              </a:ext>
+            </a:extLst>
+          </p:cNvPr>
+          <p:cNvSpPr>
+            <a:spLocks noGrp="1"/>
+          </p:cNvSpPr>
+          <p:nvPr>
+            <p:ph idx="1"/>
+          </p:nvPr>
+        </p:nvSpPr>
+        <p:spPr/>
+        <p:txBody>
+          <a:bodyPr/>
+          <a:lstStyle/>
+          <a:p>
+            <a:r>
+              <a:rPr lang="fr-FR" dirty="0"/>
+              <a:t>Simple d'utilisation</a:t>
+            </a:r>
           </a:p>
         </p:txBody>
       </p:sp>
       <p:pic>
         <p:nvPicPr>
-          <p:cNvPr id="5" name="Espace réservé du contenu 4">
+          <p:cNvPr id="5" name="Image 4">
             <a:extLst>
               <a:ext uri="{FF2B5EF4-FFF2-40B4-BE49-F238E27FC236}">
-                <a16:creationId xmlns:a16="http://schemas.microsoft.com/office/drawing/2014/main" id="{DBBC024D-30CD-7F82-A298-B30495DDA84C}"/>
+                <a16:creationId xmlns:a16="http://schemas.microsoft.com/office/drawing/2014/main" id="{B1C550BD-D115-88A8-17B8-C9BAA6F8D1E7}"/>
               </a:ext>
             </a:extLst>
           </p:cNvPr>
           <p:cNvPicPr>
-            <a:picLocks noGrp="1" noChangeAspect="1"/>
+            <a:picLocks noChangeAspect="1"/>
           </p:cNvPicPr>
-          <p:nvPr>
-            <p:ph idx="1"/>
-          </p:nvPr>
+          <p:nvPr/>
         </p:nvPicPr>
         <p:blipFill>
           <a:blip r:embed="rId2"/>
@@ -4235,43 +4299,80 @@
             <a:fillRect/>
           </a:stretch>
         </p:blipFill>
-        <p:spPr bwMode="auto">
+        <p:spPr>
           <a:xfrm>
-            <a:off x="1691680" y="1700808"/>
-            <a:ext cx="6210838" cy="2880610"/>
+            <a:off x="3275856" y="0"/>
+            <a:ext cx="2879629" cy="1268802"/>
           </a:xfrm>
           <a:prstGeom prst="rect">
             <a:avLst/>
           </a:prstGeom>
-          <a:noFill/>
-          <a:ln>
-            <a:noFill/>
-          </a:ln>
-          <a:extLst>
-            <a:ext uri="{909E8E84-426E-40DD-AFC4-6F175D3DCCD1}">
-              <a14:hiddenFill xmlns:a14="http://schemas.microsoft.com/office/drawing/2010/main">
-                <a:solidFill>
-                  <a:srgbClr val="FFFFFF"/>
-                </a:solidFill>
-              </a14:hiddenFill>
-            </a:ext>
-            <a:ext uri="{91240B29-F687-4F45-9708-019B960494DF}">
-              <a14:hiddenLine xmlns:a14="http://schemas.microsoft.com/office/drawing/2010/main" w="9525">
-                <a:solidFill>
-                  <a:srgbClr val="000000"/>
-                </a:solidFill>
-                <a:miter lim="800000"/>
-                <a:headEnd/>
-                <a:tailEnd/>
-              </a14:hiddenLine>
-            </a:ext>
-          </a:extLst>
+        </p:spPr>
+      </p:pic>
+      <p:pic>
+        <p:nvPicPr>
+          <p:cNvPr id="7" name="Image 6">
+            <a:extLst>
+              <a:ext uri="{FF2B5EF4-FFF2-40B4-BE49-F238E27FC236}">
+                <a16:creationId xmlns:a16="http://schemas.microsoft.com/office/drawing/2014/main" id="{639E9750-E83C-7142-8E48-1C2F92B59EF8}"/>
+              </a:ext>
+            </a:extLst>
+          </p:cNvPr>
+          <p:cNvPicPr>
+            <a:picLocks noChangeAspect="1"/>
+          </p:cNvPicPr>
+          <p:nvPr/>
+        </p:nvPicPr>
+        <p:blipFill>
+          <a:blip r:embed="rId3"/>
+          <a:stretch>
+            <a:fillRect/>
+          </a:stretch>
+        </p:blipFill>
+        <p:spPr>
+          <a:xfrm>
+            <a:off x="556245" y="2132856"/>
+            <a:ext cx="5488018" cy="2592330"/>
+          </a:xfrm>
+          <a:prstGeom prst="rect">
+            <a:avLst/>
+          </a:prstGeom>
+        </p:spPr>
+      </p:pic>
+      <p:pic>
+        <p:nvPicPr>
+          <p:cNvPr id="9" name="Image 8">
+            <a:extLst>
+              <a:ext uri="{FF2B5EF4-FFF2-40B4-BE49-F238E27FC236}">
+                <a16:creationId xmlns:a16="http://schemas.microsoft.com/office/drawing/2014/main" id="{43AD5C9F-F8AC-DCCE-30B5-8CA07A230016}"/>
+              </a:ext>
+            </a:extLst>
+          </p:cNvPr>
+          <p:cNvPicPr>
+            <a:picLocks noChangeAspect="1"/>
+          </p:cNvPicPr>
+          <p:nvPr/>
+        </p:nvPicPr>
+        <p:blipFill>
+          <a:blip r:embed="rId4"/>
+          <a:stretch>
+            <a:fillRect/>
+          </a:stretch>
+        </p:blipFill>
+        <p:spPr>
+          <a:xfrm>
+            <a:off x="4508859" y="4869160"/>
+            <a:ext cx="4651623" cy="1584176"/>
+          </a:xfrm>
+          <a:prstGeom prst="rect">
+            <a:avLst/>
+          </a:prstGeom>
         </p:spPr>
       </p:pic>
     </p:spTree>
     <p:extLst>
       <p:ext uri="{BB962C8B-B14F-4D97-AF65-F5344CB8AC3E}">
-        <p14:creationId xmlns:p14="http://schemas.microsoft.com/office/powerpoint/2010/main" val="1298907257"/>
+        <p14:creationId xmlns:p14="http://schemas.microsoft.com/office/powerpoint/2010/main" val="1188683548"/>
       </p:ext>
     </p:extLst>
   </p:cSld>
@@ -4303,7 +4404,7 @@
           <p:cNvPr id="2" name="Titre 1">
             <a:extLst>
               <a:ext uri="{FF2B5EF4-FFF2-40B4-BE49-F238E27FC236}">
-                <a16:creationId xmlns:a16="http://schemas.microsoft.com/office/drawing/2014/main" id="{9E85AA74-CBFB-3475-9D8D-00932BA17A97}"/>
+                <a16:creationId xmlns:a16="http://schemas.microsoft.com/office/drawing/2014/main" id="{CAC3DEE1-674E-D6C0-48F2-627B9D9BDB06}"/>
               </a:ext>
             </a:extLst>
           </p:cNvPr>
@@ -4320,9 +4421,10 @@
           <a:lstStyle/>
           <a:p>
             <a:r>
-              <a:rPr lang="fr-FR" dirty="0"/>
-              <a:t>Environnement de test</a:t>
-            </a:r>
+              <a:rPr lang="fr-FR" dirty="0" err="1"/>
+              <a:t>Quantization</a:t>
+            </a:r>
+            <a:endParaRPr lang="fr-FR" dirty="0"/>
           </a:p>
         </p:txBody>
       </p:sp>
@@ -4331,7 +4433,7 @@
           <p:cNvPr id="3" name="Espace réservé du contenu 2">
             <a:extLst>
               <a:ext uri="{FF2B5EF4-FFF2-40B4-BE49-F238E27FC236}">
-                <a16:creationId xmlns:a16="http://schemas.microsoft.com/office/drawing/2014/main" id="{EF298657-53D9-820D-377E-A5DCC7916435}"/>
+                <a16:creationId xmlns:a16="http://schemas.microsoft.com/office/drawing/2014/main" id="{081227E9-2736-55C6-5525-0BF39C30B3D3}"/>
               </a:ext>
             </a:extLst>
           </p:cNvPr>
@@ -4348,98 +4450,97 @@
           <a:lstStyle/>
           <a:p>
             <a:r>
+              <a:rPr lang="fr-FR" dirty="0"/>
+              <a:t>Il est possible de </a:t>
+            </a:r>
+            <a:r>
               <a:rPr lang="fr-FR" dirty="0" err="1"/>
-              <a:t>XNNPack</a:t>
-            </a:r>
-            <a:r>
-              <a:rPr lang="fr-FR" dirty="0"/>
-              <a:t> ne fonctionne pas sur microcontrôleur</a:t>
-            </a:r>
-          </a:p>
-          <a:p>
-            <a:pPr lvl="1"/>
-            <a:r>
-              <a:rPr lang="fr-FR" dirty="0"/>
-              <a:t>Uniquement sur Intel, AMD, ARM comme le Raspberry Pi</a:t>
-            </a:r>
-          </a:p>
-          <a:p>
+              <a:t>quantiser</a:t>
+            </a:r>
+            <a:r>
+              <a:rPr lang="fr-FR" dirty="0"/>
+              <a:t> le modèle</a:t>
+            </a:r>
+          </a:p>
+          <a:p>
+            <a:r>
+              <a:rPr lang="fr-FR" dirty="0"/>
+              <a:t>Par défaut en </a:t>
+            </a:r>
             <a:r>
               <a:rPr lang="fr-FR" dirty="0" err="1"/>
-              <a:t>XNNPack</a:t>
-            </a:r>
-            <a:r>
-              <a:rPr lang="fr-FR" dirty="0"/>
-              <a:t> est surtout très utile pour tester une inférence sur PC</a:t>
-            </a:r>
-          </a:p>
-          <a:p>
-            <a:pPr lvl="1"/>
-            <a:r>
-              <a:rPr lang="fr-FR" dirty="0"/>
-              <a:t>Sans passer par le </a:t>
+              <a:t>fixed</a:t>
+            </a:r>
+            <a:r>
+              <a:rPr lang="fr-FR" dirty="0"/>
+              <a:t> 16, 6</a:t>
+            </a:r>
+          </a:p>
+          <a:p>
+            <a:endParaRPr lang="fr-FR" dirty="0"/>
+          </a:p>
+          <a:p>
+            <a:endParaRPr lang="fr-FR" dirty="0"/>
+          </a:p>
+          <a:p>
+            <a:endParaRPr lang="fr-FR" dirty="0"/>
+          </a:p>
+          <a:p>
+            <a:endParaRPr lang="fr-FR" dirty="0"/>
+          </a:p>
+          <a:p>
+            <a:r>
+              <a:rPr lang="fr-FR" dirty="0"/>
+              <a:t>Il est possible de </a:t>
             </a:r>
             <a:r>
               <a:rPr lang="fr-FR" dirty="0" err="1"/>
-              <a:t>micro-contrôleur</a:t>
-            </a:r>
+              <a:t>quantiser</a:t>
+            </a:r>
+            <a:r>
+              <a:rPr lang="fr-FR" dirty="0"/>
+              <a:t> par layer</a:t>
+            </a:r>
+          </a:p>
+          <a:p>
             <a:endParaRPr lang="fr-FR" dirty="0"/>
           </a:p>
-          <a:p>
-            <a:pPr lvl="1"/>
-            <a:r>
-              <a:rPr lang="fr-FR" dirty="0"/>
-              <a:t>Tests en Python ou C++</a:t>
-            </a:r>
-          </a:p>
-          <a:p>
-            <a:pPr lvl="1"/>
-            <a:r>
-              <a:rPr lang="fr-FR" dirty="0"/>
-              <a:t>Installation facile sur Windows et Linux</a:t>
-            </a:r>
-          </a:p>
-          <a:p>
-            <a:pPr lvl="1"/>
-            <a:r>
-              <a:rPr lang="fr-FR" dirty="0"/>
-              <a:t>Ne nécessite pas une architecture propriétaire pour compiler</a:t>
-            </a:r>
-          </a:p>
-          <a:p>
-            <a:pPr lvl="1"/>
-            <a:r>
-              <a:rPr lang="fr-FR" dirty="0"/>
-              <a:t>Par exemple ARM nécessite de compiler sur ARM</a:t>
-            </a:r>
-          </a:p>
-          <a:p>
-            <a:pPr lvl="1"/>
-            <a:r>
-              <a:rPr lang="fr-FR" dirty="0" err="1"/>
-              <a:t>Comptabile</a:t>
-            </a:r>
-            <a:r>
-              <a:rPr lang="fr-FR" dirty="0"/>
-              <a:t> CUDA et donc GPU</a:t>
-            </a:r>
-          </a:p>
-          <a:p>
-            <a:pPr marL="0" indent="0">
-              <a:buNone/>
-            </a:pPr>
-            <a:endParaRPr lang="fr-FR" dirty="0"/>
-          </a:p>
-          <a:p>
-            <a:pPr lvl="1"/>
-            <a:endParaRPr lang="fr-FR" dirty="0"/>
-          </a:p>
-        </p:txBody>
-      </p:sp>
+        </p:txBody>
+      </p:sp>
+      <p:pic>
+        <p:nvPicPr>
+          <p:cNvPr id="5" name="Image 4">
+            <a:extLst>
+              <a:ext uri="{FF2B5EF4-FFF2-40B4-BE49-F238E27FC236}">
+                <a16:creationId xmlns:a16="http://schemas.microsoft.com/office/drawing/2014/main" id="{42405446-CF65-0791-E8DD-16DFE9EAAB9F}"/>
+              </a:ext>
+            </a:extLst>
+          </p:cNvPr>
+          <p:cNvPicPr>
+            <a:picLocks noChangeAspect="1"/>
+          </p:cNvPicPr>
+          <p:nvPr/>
+        </p:nvPicPr>
+        <p:blipFill>
+          <a:blip r:embed="rId2"/>
+          <a:stretch>
+            <a:fillRect/>
+          </a:stretch>
+        </p:blipFill>
+        <p:spPr>
+          <a:xfrm>
+            <a:off x="1074117" y="2666934"/>
+            <a:ext cx="6995766" cy="1524132"/>
+          </a:xfrm>
+          <a:prstGeom prst="rect">
+            <a:avLst/>
+          </a:prstGeom>
+        </p:spPr>
+      </p:pic>
     </p:spTree>
     <p:extLst>
       <p:ext uri="{BB962C8B-B14F-4D97-AF65-F5344CB8AC3E}">
-        <p14:creationId xmlns:p14="http://schemas.microsoft.com/office/powerpoint/2010/main" val="1151949424"/>
+        <p14:creationId xmlns:p14="http://schemas.microsoft.com/office/powerpoint/2010/main" val="1358939677"/>
       </p:ext>
     </p:extLst>
   </p:cSld>
@@ -4471,7 +4572,7 @@
           <p:cNvPr id="2" name="Titre 1">
             <a:extLst>
               <a:ext uri="{FF2B5EF4-FFF2-40B4-BE49-F238E27FC236}">
-                <a16:creationId xmlns:a16="http://schemas.microsoft.com/office/drawing/2014/main" id="{C11F19D2-37D5-C841-43F6-3554E434E475}"/>
+                <a16:creationId xmlns:a16="http://schemas.microsoft.com/office/drawing/2014/main" id="{8584988B-F043-F6AA-FDD1-A24565B54D9F}"/>
               </a:ext>
             </a:extLst>
           </p:cNvPr>
@@ -4489,7 +4590,7 @@
           <a:p>
             <a:r>
               <a:rPr lang="fr-FR" dirty="0"/>
-              <a:t>Optimisations</a:t>
+              <a:t>HGQ2</a:t>
             </a:r>
           </a:p>
         </p:txBody>
@@ -4499,7 +4600,7 @@
           <p:cNvPr id="3" name="Espace réservé du contenu 2">
             <a:extLst>
               <a:ext uri="{FF2B5EF4-FFF2-40B4-BE49-F238E27FC236}">
-                <a16:creationId xmlns:a16="http://schemas.microsoft.com/office/drawing/2014/main" id="{F2F0F5CF-AE1C-926A-5E26-D6BDA32C7C75}"/>
+                <a16:creationId xmlns:a16="http://schemas.microsoft.com/office/drawing/2014/main" id="{CFEF4CC4-461E-40C5-D8E4-27ADB7A79F6B}"/>
               </a:ext>
             </a:extLst>
           </p:cNvPr>
@@ -4517,97 +4618,69 @@
           <a:p>
             <a:r>
               <a:rPr lang="fr-FR" dirty="0"/>
-              <a:t>Quantification</a:t>
-            </a:r>
-          </a:p>
-          <a:p>
-            <a:pPr lvl="1"/>
-            <a:r>
-              <a:rPr lang="fr-FR" dirty="0"/>
-              <a:t>Support intégré via </a:t>
+              <a:t>High </a:t>
             </a:r>
             <a:r>
               <a:rPr lang="fr-FR" dirty="0" err="1"/>
-              <a:t>torchao</a:t>
-            </a:r>
-            <a:r>
-              <a:rPr lang="fr-FR" dirty="0"/>
-              <a:t> pour la quantification en 8 bits, 4 bits et dynamique</a:t>
-            </a:r>
-          </a:p>
-          <a:p>
-            <a:r>
-              <a:rPr lang="fr-FR" dirty="0"/>
-              <a:t>Planification mémoire</a:t>
-            </a:r>
-          </a:p>
-          <a:p>
-            <a:pPr lvl="1"/>
-            <a:r>
-              <a:rPr lang="fr-FR" dirty="0"/>
-              <a:t>Optimisation de l’utilisation mémoire grâce à des stratégies d’allocation anticipée (</a:t>
+              <a:t>Granularity</a:t>
+            </a:r>
+            <a:r>
+              <a:rPr lang="fr-FR" dirty="0"/>
+              <a:t> </a:t>
             </a:r>
             <a:r>
               <a:rPr lang="fr-FR" dirty="0" err="1"/>
-              <a:t>ahead</a:t>
-            </a:r>
-            <a:r>
-              <a:rPr lang="fr-FR" dirty="0"/>
-              <a:t>-of-time)</a:t>
-            </a:r>
-          </a:p>
-          <a:p>
-            <a:r>
-              <a:rPr lang="fr-FR" dirty="0"/>
-              <a:t>Outils développeur</a:t>
-            </a:r>
-          </a:p>
-          <a:p>
-            <a:pPr lvl="1"/>
-            <a:r>
-              <a:rPr lang="fr-FR" dirty="0"/>
-              <a:t>Profiler </a:t>
+              <a:t>Quantization</a:t>
+            </a:r>
+            <a:r>
+              <a:rPr lang="fr-FR" dirty="0"/>
+              <a:t> 2 est un </a:t>
             </a:r>
             <a:r>
               <a:rPr lang="fr-FR" dirty="0" err="1"/>
-              <a:t>ETDump</a:t>
-            </a:r>
-            <a:r>
-              <a:rPr lang="fr-FR" dirty="0"/>
-              <a:t>, inspecteur </a:t>
+              <a:t>framework</a:t>
+            </a:r>
+            <a:r>
+              <a:rPr lang="fr-FR" dirty="0"/>
+              <a:t> d’entraînement sensible à la quantification (</a:t>
             </a:r>
             <a:r>
               <a:rPr lang="fr-FR" dirty="0" err="1"/>
-              <a:t>ETRecord</a:t>
-            </a:r>
-            <a:r>
-              <a:rPr lang="fr-FR" dirty="0"/>
-              <a:t> et débogueur de modèle</a:t>
-            </a:r>
-          </a:p>
-          <a:p>
+              <a:t>quantization-aware</a:t>
+            </a:r>
+            <a:r>
+              <a:rPr lang="fr-FR" dirty="0"/>
+              <a:t> training) basé sur </a:t>
+            </a:r>
             <a:r>
               <a:rPr lang="fr-FR" dirty="0" err="1"/>
-              <a:t>Build</a:t>
-            </a:r>
-            <a:r>
-              <a:rPr lang="fr-FR" dirty="0"/>
-              <a:t> sélectif</a:t>
-            </a:r>
-          </a:p>
-          <a:p>
-            <a:pPr lvl="1"/>
-            <a:r>
-              <a:rPr lang="fr-FR" dirty="0"/>
-              <a:t>Suppression des opérateurs inutilisés pour réduire la taille du </a:t>
+              <a:t>Keras</a:t>
+            </a:r>
+            <a:r>
+              <a:rPr lang="fr-FR" dirty="0"/>
+              <a:t> v3, destiné aux applications de </a:t>
             </a:r>
             <a:r>
               <a:rPr lang="fr-FR" dirty="0" err="1"/>
-              <a:t>binaireOpérateurs</a:t>
-            </a:r>
-            <a:r>
-              <a:rPr lang="fr-FR" dirty="0"/>
-              <a:t> personnalisés</a:t>
+              <a:t>deep</a:t>
+            </a:r>
+            <a:r>
+              <a:rPr lang="fr-FR" dirty="0"/>
+              <a:t> </a:t>
+            </a:r>
+            <a:r>
+              <a:rPr lang="fr-FR" dirty="0" err="1"/>
+              <a:t>learning</a:t>
+            </a:r>
+            <a:r>
+              <a:rPr lang="fr-FR" dirty="0"/>
+              <a:t> en temps réel sur des dispositifs embarqués tels que les FPGA</a:t>
+            </a:r>
+          </a:p>
+          <a:p>
+            <a:r>
+              <a:rPr lang="fr-FR" dirty="0"/>
+              <a:t>Il fournit un ensemble complet d’outils permettant de créer et d’entraîner des réseaux de neurones quantifiés avec un minimum d’effort</a:t>
             </a:r>
           </a:p>
         </p:txBody>
@@ -4615,7 +4688,7 @@
     </p:spTree>
     <p:extLst>
       <p:ext uri="{BB962C8B-B14F-4D97-AF65-F5344CB8AC3E}">
-        <p14:creationId xmlns:p14="http://schemas.microsoft.com/office/powerpoint/2010/main" val="439027090"/>
+        <p14:creationId xmlns:p14="http://schemas.microsoft.com/office/powerpoint/2010/main" val="1643866067"/>
       </p:ext>
     </p:extLst>
   </p:cSld>
@@ -4647,7 +4720,7 @@
           <p:cNvPr id="2" name="Titre 1">
             <a:extLst>
               <a:ext uri="{FF2B5EF4-FFF2-40B4-BE49-F238E27FC236}">
-                <a16:creationId xmlns:a16="http://schemas.microsoft.com/office/drawing/2014/main" id="{1BA32208-BA2B-91EF-0DEC-DFF3F2116C63}"/>
+                <a16:creationId xmlns:a16="http://schemas.microsoft.com/office/drawing/2014/main" id="{04938716-B8B5-89C0-974E-84BCE2571599}"/>
               </a:ext>
             </a:extLst>
           </p:cNvPr>
@@ -4664,10 +4737,9 @@
           <a:lstStyle/>
           <a:p>
             <a:r>
-              <a:rPr lang="fr-FR" dirty="0" err="1"/>
-              <a:t>Torchao</a:t>
-            </a:r>
-            <a:endParaRPr lang="fr-FR" dirty="0"/>
+              <a:rPr lang="fr-FR" dirty="0"/>
+              <a:t>HGQ2</a:t>
+            </a:r>
           </a:p>
         </p:txBody>
       </p:sp>
@@ -4676,7 +4748,7 @@
           <p:cNvPr id="3" name="Espace réservé du contenu 2">
             <a:extLst>
               <a:ext uri="{FF2B5EF4-FFF2-40B4-BE49-F238E27FC236}">
-                <a16:creationId xmlns:a16="http://schemas.microsoft.com/office/drawing/2014/main" id="{3F1F05C0-01EA-6D0C-279F-D9C8559F6A5C}"/>
+                <a16:creationId xmlns:a16="http://schemas.microsoft.com/office/drawing/2014/main" id="{360E1EDC-2D17-3205-9080-E6771184DD69}"/>
               </a:ext>
             </a:extLst>
           </p:cNvPr>
@@ -4694,48 +4766,63 @@
           <a:p>
             <a:r>
               <a:rPr lang="fr-FR" dirty="0"/>
-              <a:t>Outil de </a:t>
+              <a:t>Nécessite de </a:t>
             </a:r>
             <a:r>
               <a:rPr lang="fr-FR" dirty="0" err="1"/>
-              <a:t>quantisation</a:t>
+              <a:t>réentrainner</a:t>
+            </a:r>
+            <a:r>
+              <a:rPr lang="fr-FR" dirty="0"/>
+              <a:t> le modèle</a:t>
+            </a:r>
+          </a:p>
+          <a:p>
+            <a:pPr lvl="1"/>
+            <a:r>
+              <a:rPr lang="fr-FR" dirty="0"/>
+              <a:t>Uniquement avec </a:t>
+            </a:r>
+            <a:r>
+              <a:rPr lang="fr-FR" dirty="0" err="1"/>
+              <a:t>Keras</a:t>
             </a:r>
             <a:endParaRPr lang="fr-FR" dirty="0"/>
           </a:p>
           <a:p>
-            <a:r>
-              <a:rPr lang="fr-FR" dirty="0"/>
-              <a:t>int16, int8, int4 !</a:t>
-            </a:r>
-          </a:p>
-          <a:p>
+            <a:pPr lvl="1"/>
+            <a:r>
+              <a:rPr lang="fr-FR" dirty="0"/>
+              <a:t>Doit être fait dés le début du projet : assez lourd</a:t>
+            </a:r>
+          </a:p>
+          <a:p>
+            <a:pPr lvl="1"/>
+            <a:r>
+              <a:rPr lang="fr-FR" dirty="0"/>
+              <a:t>Nouveaux </a:t>
+            </a:r>
             <a:r>
               <a:rPr lang="fr-FR" dirty="0" err="1"/>
-              <a:t>Quantisation</a:t>
-            </a:r>
-            <a:r>
-              <a:rPr lang="fr-FR" dirty="0"/>
-              <a:t> possible sur GPU via Cuda</a:t>
+              <a:t>layers</a:t>
+            </a:r>
+            <a:r>
+              <a:rPr lang="fr-FR" dirty="0"/>
+              <a:t> préfixés par Q</a:t>
             </a:r>
           </a:p>
           <a:p>
             <a:pPr lvl="1"/>
-            <a:r>
-              <a:rPr lang="fr-FR" dirty="0"/>
-              <a:t>C'est indépendant la prédiction</a:t>
-            </a:r>
-          </a:p>
-          <a:p>
             <a:endParaRPr lang="fr-FR" dirty="0"/>
           </a:p>
         </p:txBody>
       </p:sp>
       <p:pic>
         <p:nvPicPr>
-          <p:cNvPr id="5" name="Image 4">
+          <p:cNvPr id="7" name="Image 6">
             <a:extLst>
               <a:ext uri="{FF2B5EF4-FFF2-40B4-BE49-F238E27FC236}">
-                <a16:creationId xmlns:a16="http://schemas.microsoft.com/office/drawing/2014/main" id="{62E3B86C-8CE8-960B-CDC2-0DF45FAFAC07}"/>
+                <a16:creationId xmlns:a16="http://schemas.microsoft.com/office/drawing/2014/main" id="{00229EC8-E078-56F1-0AD8-1EA4802460AE}"/>
               </a:ext>
             </a:extLst>
           </p:cNvPr>
@@ -4752,8 +4839,8 @@
         </p:blipFill>
         <p:spPr>
           <a:xfrm>
-            <a:off x="1475656" y="3789040"/>
-            <a:ext cx="6378493" cy="929721"/>
+            <a:off x="1187624" y="3645024"/>
+            <a:ext cx="6896698" cy="2187130"/>
           </a:xfrm>
           <a:prstGeom prst="rect">
             <a:avLst/>
@@ -4763,7 +4850,7 @@
     </p:spTree>
     <p:extLst>
       <p:ext uri="{BB962C8B-B14F-4D97-AF65-F5344CB8AC3E}">
-        <p14:creationId xmlns:p14="http://schemas.microsoft.com/office/powerpoint/2010/main" val="419542954"/>
+        <p14:creationId xmlns:p14="http://schemas.microsoft.com/office/powerpoint/2010/main" val="4074759597"/>
       </p:ext>
     </p:extLst>
   </p:cSld>
@@ -4795,7 +4882,7 @@
           <p:cNvPr id="2" name="Titre 1">
             <a:extLst>
               <a:ext uri="{FF2B5EF4-FFF2-40B4-BE49-F238E27FC236}">
-                <a16:creationId xmlns:a16="http://schemas.microsoft.com/office/drawing/2014/main" id="{9CEB93DC-BBE0-54D5-A00A-CA8292581468}"/>
+                <a16:creationId xmlns:a16="http://schemas.microsoft.com/office/drawing/2014/main" id="{64667B77-0575-89D7-53C7-DC15756C7AF1}"/>
               </a:ext>
             </a:extLst>
           </p:cNvPr>
@@ -4813,7 +4900,7 @@
           <a:p>
             <a:r>
               <a:rPr lang="fr-FR" dirty="0"/>
-              <a:t>TP 28</a:t>
+              <a:t>TP 31</a:t>
             </a:r>
           </a:p>
         </p:txBody>
@@ -4823,7 +4910,7 @@
           <p:cNvPr id="3" name="Espace réservé du contenu 2">
             <a:extLst>
               <a:ext uri="{FF2B5EF4-FFF2-40B4-BE49-F238E27FC236}">
-                <a16:creationId xmlns:a16="http://schemas.microsoft.com/office/drawing/2014/main" id="{44733D03-FE4A-7F16-AD34-60E62DDAC536}"/>
+                <a16:creationId xmlns:a16="http://schemas.microsoft.com/office/drawing/2014/main" id="{8828E4A6-7972-5298-D2FE-83FD1CE35D81}"/>
               </a:ext>
             </a:extLst>
           </p:cNvPr>
@@ -4840,47 +4927,14 @@
           <a:lstStyle/>
           <a:p>
             <a:r>
-              <a:rPr lang="fr-FR" dirty="0" err="1"/>
-              <a:t>ExecuTorch</a:t>
-            </a:r>
-            <a:r>
-              <a:rPr lang="fr-FR" dirty="0"/>
-              <a:t> Cancer</a:t>
-            </a:r>
-          </a:p>
-          <a:p>
-            <a:r>
-              <a:rPr lang="fr-FR" dirty="0" err="1"/>
-              <a:t>XNNPack</a:t>
-            </a:r>
-            <a:r>
-              <a:rPr lang="fr-FR" dirty="0"/>
-              <a:t> </a:t>
-            </a:r>
-            <a:r>
-              <a:rPr lang="fr-FR" dirty="0" err="1"/>
-              <a:t>Quantisation</a:t>
-            </a:r>
-            <a:endParaRPr lang="fr-FR" dirty="0"/>
-          </a:p>
-          <a:p>
-            <a:r>
-              <a:rPr lang="fr-FR" dirty="0" err="1"/>
-              <a:t>XNNPack</a:t>
-            </a:r>
-            <a:r>
-              <a:rPr lang="fr-FR" dirty="0"/>
-              <a:t> Prédiction</a:t>
-            </a:r>
-          </a:p>
-          <a:p>
-            <a:r>
-              <a:rPr lang="fr-FR" dirty="0" err="1"/>
-              <a:t>ExecuTorch</a:t>
-            </a:r>
-            <a:r>
-              <a:rPr lang="fr-FR" dirty="0"/>
-              <a:t> MNIST</a:t>
+              <a:rPr lang="fr-FR" dirty="0"/>
+              <a:t>Cancer HLS2ML</a:t>
+            </a:r>
+          </a:p>
+          <a:p>
+            <a:r>
+              <a:rPr lang="fr-FR" dirty="0"/>
+              <a:t>MNIST HLS2ML</a:t>
             </a:r>
           </a:p>
         </p:txBody>
@@ -4888,7 +4942,7 @@
     </p:spTree>
     <p:extLst>
       <p:ext uri="{BB962C8B-B14F-4D97-AF65-F5344CB8AC3E}">
-        <p14:creationId xmlns:p14="http://schemas.microsoft.com/office/powerpoint/2010/main" val="1556949608"/>
+        <p14:creationId xmlns:p14="http://schemas.microsoft.com/office/powerpoint/2010/main" val="173931500"/>
       </p:ext>
     </p:extLst>
   </p:cSld>
@@ -4920,7 +4974,7 @@
           <p:cNvPr id="2" name="Titre 1">
             <a:extLst>
               <a:ext uri="{FF2B5EF4-FFF2-40B4-BE49-F238E27FC236}">
-                <a16:creationId xmlns:a16="http://schemas.microsoft.com/office/drawing/2014/main" id="{C650BDD0-94AA-BB01-2277-71F318FEF835}"/>
+                <a16:creationId xmlns:a16="http://schemas.microsoft.com/office/drawing/2014/main" id="{9A66BE6C-5590-10D1-8704-255B26CD063D}"/>
               </a:ext>
             </a:extLst>
           </p:cNvPr>
@@ -4938,7 +4992,7 @@
           <a:p>
             <a:r>
               <a:rPr lang="fr-FR" dirty="0"/>
-              <a:t>Les autres plateformes</a:t>
+              <a:t>Vitis AI</a:t>
             </a:r>
           </a:p>
         </p:txBody>
@@ -4948,7 +5002,7 @@
           <p:cNvPr id="3" name="Espace réservé du contenu 2">
             <a:extLst>
               <a:ext uri="{FF2B5EF4-FFF2-40B4-BE49-F238E27FC236}">
-                <a16:creationId xmlns:a16="http://schemas.microsoft.com/office/drawing/2014/main" id="{400A9885-F03B-80D9-E13D-CDF8C0661AE5}"/>
+                <a16:creationId xmlns:a16="http://schemas.microsoft.com/office/drawing/2014/main" id="{604C8F7B-45D4-89B4-8923-5A154CEA104A}"/>
               </a:ext>
             </a:extLst>
           </p:cNvPr>
@@ -4966,74 +5020,175 @@
           <a:p>
             <a:r>
               <a:rPr lang="fr-FR" dirty="0"/>
-              <a:t>Il est donc possible de tester le GPU via CUDA et </a:t>
+              <a:t>Vitis AI est un IDE qui est utilisé pour accélérer l’inférence de ML sur les plateformes adaptatives d’AMD</a:t>
+            </a:r>
+          </a:p>
+          <a:p>
+            <a:r>
+              <a:rPr lang="fr-FR" dirty="0"/>
+              <a:t>Il est conçu dans une optique de haute efficacité et de facilité d’utilisation, permettant d’exploiter pleinement le potentiel de l’accélération de l’IA sur les </a:t>
             </a:r>
             <a:r>
               <a:rPr lang="fr-FR" dirty="0" err="1"/>
-              <a:t>XNNPack</a:t>
-            </a:r>
-            <a:endParaRPr lang="fr-FR" dirty="0"/>
-          </a:p>
-          <a:p>
-            <a:pPr lvl="1"/>
-            <a:r>
-              <a:rPr lang="fr-FR" dirty="0"/>
-              <a:t>Il suffit que CUDA soit installé</a:t>
-            </a:r>
-          </a:p>
-          <a:p>
-            <a:r>
-              <a:rPr lang="fr-FR" dirty="0"/>
-              <a:t>ARM Cortex M</a:t>
-            </a:r>
-          </a:p>
-          <a:p>
-            <a:pPr lvl="1"/>
-            <a:r>
-              <a:rPr lang="fr-FR" dirty="0"/>
-              <a:t>Il est possible d'utiliser un ARM avec GPU</a:t>
-            </a:r>
-          </a:p>
-          <a:p>
-            <a:pPr lvl="1"/>
-            <a:r>
-              <a:rPr lang="fr-FR" dirty="0"/>
-              <a:t>Difficile à utiliser en formation car la </a:t>
-            </a:r>
-            <a:r>
-              <a:rPr lang="fr-FR" dirty="0" err="1"/>
-              <a:t>quantisation</a:t>
-            </a:r>
-            <a:r>
-              <a:rPr lang="fr-FR" dirty="0"/>
-              <a:t> et la prédiction doivent être compilées en ARM</a:t>
-            </a:r>
-          </a:p>
-          <a:p>
-            <a:r>
-              <a:rPr lang="fr-FR" dirty="0"/>
-              <a:t>NXP</a:t>
-            </a:r>
-          </a:p>
-          <a:p>
-            <a:pPr lvl="1"/>
-            <a:r>
-              <a:rPr lang="fr-FR" dirty="0"/>
-              <a:t>NPU</a:t>
-            </a:r>
-          </a:p>
-          <a:p>
-            <a:endParaRPr lang="fr-FR" dirty="0"/>
-          </a:p>
-          <a:p>
-            <a:endParaRPr lang="fr-FR" dirty="0"/>
-          </a:p>
-        </p:txBody>
-      </p:sp>
+              <a:t>SoC</a:t>
+            </a:r>
+            <a:r>
+              <a:rPr lang="fr-FR" dirty="0"/>
+              <a:t> adaptatifs AMD</a:t>
+            </a:r>
+          </a:p>
+        </p:txBody>
+      </p:sp>
+      <p:pic>
+        <p:nvPicPr>
+          <p:cNvPr id="5" name="Image 4">
+            <a:extLst>
+              <a:ext uri="{FF2B5EF4-FFF2-40B4-BE49-F238E27FC236}">
+                <a16:creationId xmlns:a16="http://schemas.microsoft.com/office/drawing/2014/main" id="{E07A3F79-6383-A23F-BD01-C81CCEF75935}"/>
+              </a:ext>
+            </a:extLst>
+          </p:cNvPr>
+          <p:cNvPicPr>
+            <a:picLocks noChangeAspect="1"/>
+          </p:cNvPicPr>
+          <p:nvPr/>
+        </p:nvPicPr>
+        <p:blipFill>
+          <a:blip r:embed="rId2"/>
+          <a:stretch>
+            <a:fillRect/>
+          </a:stretch>
+        </p:blipFill>
+        <p:spPr>
+          <a:xfrm>
+            <a:off x="3635896" y="117264"/>
+            <a:ext cx="2644369" cy="1295512"/>
+          </a:xfrm>
+          <a:prstGeom prst="rect">
+            <a:avLst/>
+          </a:prstGeom>
+        </p:spPr>
+      </p:pic>
     </p:spTree>
     <p:extLst>
       <p:ext uri="{BB962C8B-B14F-4D97-AF65-F5344CB8AC3E}">
-        <p14:creationId xmlns:p14="http://schemas.microsoft.com/office/powerpoint/2010/main" val="3932626197"/>
+        <p14:creationId xmlns:p14="http://schemas.microsoft.com/office/powerpoint/2010/main" val="3659036938"/>
+      </p:ext>
+    </p:extLst>
+  </p:cSld>
+  <p:clrMapOvr>
+    <a:masterClrMapping/>
+  </p:clrMapOvr>
+</p:sld>
+</file>
+
+<file path=ppt/slides/slide19.xml><?xml version="1.0" encoding="utf-8"?>
+<p:sld xmlns:a="http://schemas.openxmlformats.org/drawingml/2006/main" xmlns:r="http://schemas.openxmlformats.org/officeDocument/2006/relationships" xmlns:p="http://schemas.openxmlformats.org/presentationml/2006/main">
+  <p:cSld>
+    <p:spTree>
+      <p:nvGrpSpPr>
+        <p:cNvPr id="1" name=""/>
+        <p:cNvGrpSpPr/>
+        <p:nvPr/>
+      </p:nvGrpSpPr>
+      <p:grpSpPr>
+        <a:xfrm>
+          <a:off x="0" y="0"/>
+          <a:ext cx="0" cy="0"/>
+          <a:chOff x="0" y="0"/>
+          <a:chExt cx="0" cy="0"/>
+        </a:xfrm>
+      </p:grpSpPr>
+      <p:sp>
+        <p:nvSpPr>
+          <p:cNvPr id="2" name="Titre 1">
+            <a:extLst>
+              <a:ext uri="{FF2B5EF4-FFF2-40B4-BE49-F238E27FC236}">
+                <a16:creationId xmlns:a16="http://schemas.microsoft.com/office/drawing/2014/main" id="{506A0BD7-841B-A922-8210-66CE6F3B44C8}"/>
+              </a:ext>
+            </a:extLst>
+          </p:cNvPr>
+          <p:cNvSpPr>
+            <a:spLocks noGrp="1"/>
+          </p:cNvSpPr>
+          <p:nvPr>
+            <p:ph type="title"/>
+          </p:nvPr>
+        </p:nvSpPr>
+        <p:spPr/>
+        <p:txBody>
+          <a:bodyPr/>
+          <a:lstStyle/>
+          <a:p>
+            <a:r>
+              <a:rPr lang="fr-FR" dirty="0"/>
+              <a:t>Vitis AI</a:t>
+            </a:r>
+          </a:p>
+        </p:txBody>
+      </p:sp>
+      <p:sp>
+        <p:nvSpPr>
+          <p:cNvPr id="3" name="Espace réservé du contenu 2">
+            <a:extLst>
+              <a:ext uri="{FF2B5EF4-FFF2-40B4-BE49-F238E27FC236}">
+                <a16:creationId xmlns:a16="http://schemas.microsoft.com/office/drawing/2014/main" id="{A77C4480-5EC0-1E61-C52B-595889BA8CEC}"/>
+              </a:ext>
+            </a:extLst>
+          </p:cNvPr>
+          <p:cNvSpPr>
+            <a:spLocks noGrp="1"/>
+          </p:cNvSpPr>
+          <p:nvPr>
+            <p:ph idx="1"/>
+          </p:nvPr>
+        </p:nvSpPr>
+        <p:spPr/>
+        <p:txBody>
+          <a:bodyPr/>
+          <a:lstStyle/>
+          <a:p>
+            <a:r>
+              <a:rPr lang="fr-FR" dirty="0"/>
+              <a:t>Supporte TF, PT et ONNX</a:t>
+            </a:r>
+          </a:p>
+        </p:txBody>
+      </p:sp>
+      <p:pic>
+        <p:nvPicPr>
+          <p:cNvPr id="5" name="Image 4">
+            <a:extLst>
+              <a:ext uri="{FF2B5EF4-FFF2-40B4-BE49-F238E27FC236}">
+                <a16:creationId xmlns:a16="http://schemas.microsoft.com/office/drawing/2014/main" id="{8D0AA6AF-94FE-EF54-7C6B-8C22C2ADC68C}"/>
+              </a:ext>
+            </a:extLst>
+          </p:cNvPr>
+          <p:cNvPicPr>
+            <a:picLocks noChangeAspect="1"/>
+          </p:cNvPicPr>
+          <p:nvPr/>
+        </p:nvPicPr>
+        <p:blipFill>
+          <a:blip r:embed="rId2"/>
+          <a:stretch>
+            <a:fillRect/>
+          </a:stretch>
+        </p:blipFill>
+        <p:spPr>
+          <a:xfrm>
+            <a:off x="0" y="2564904"/>
+            <a:ext cx="9144000" cy="3324483"/>
+          </a:xfrm>
+          <a:prstGeom prst="rect">
+            <a:avLst/>
+          </a:prstGeom>
+        </p:spPr>
+      </p:pic>
+    </p:spTree>
+    <p:extLst>
+      <p:ext uri="{BB962C8B-B14F-4D97-AF65-F5344CB8AC3E}">
+        <p14:creationId xmlns:p14="http://schemas.microsoft.com/office/powerpoint/2010/main" val="3990560790"/>
       </p:ext>
     </p:extLst>
   </p:cSld>
@@ -5065,7 +5220,7 @@
           <p:cNvPr id="2" name="Titre 1">
             <a:extLst>
               <a:ext uri="{FF2B5EF4-FFF2-40B4-BE49-F238E27FC236}">
-                <a16:creationId xmlns:a16="http://schemas.microsoft.com/office/drawing/2014/main" id="{79FBC646-AFF2-69B0-BD15-B8D790C13CEC}"/>
+                <a16:creationId xmlns:a16="http://schemas.microsoft.com/office/drawing/2014/main" id="{98E90674-A30F-2BBF-823C-4AB24813DD31}"/>
               </a:ext>
             </a:extLst>
           </p:cNvPr>
@@ -5082,10 +5237,9 @@
           <a:lstStyle/>
           <a:p>
             <a:r>
-              <a:rPr lang="fr-FR" dirty="0" err="1"/>
-              <a:t>ExecuTorch</a:t>
-            </a:r>
-            <a:endParaRPr lang="fr-FR" dirty="0"/>
+              <a:rPr lang="fr-FR" dirty="0"/>
+              <a:t>Pourquoi ?</a:t>
+            </a:r>
           </a:p>
         </p:txBody>
       </p:sp>
@@ -5094,7 +5248,7 @@
           <p:cNvPr id="3" name="Espace réservé du contenu 2">
             <a:extLst>
               <a:ext uri="{FF2B5EF4-FFF2-40B4-BE49-F238E27FC236}">
-                <a16:creationId xmlns:a16="http://schemas.microsoft.com/office/drawing/2014/main" id="{1B3219AB-02E3-541B-CCCB-156421AB40E2}"/>
+                <a16:creationId xmlns:a16="http://schemas.microsoft.com/office/drawing/2014/main" id="{12F2A1DC-52BD-A3B3-A109-54EF4BB4B54F}"/>
               </a:ext>
             </a:extLst>
           </p:cNvPr>
@@ -5111,56 +5265,795 @@
           <a:lstStyle/>
           <a:p>
             <a:r>
-              <a:rPr lang="fr-FR" dirty="0" err="1"/>
-              <a:t>ExecuTorch</a:t>
-            </a:r>
-            <a:r>
-              <a:rPr lang="fr-FR" dirty="0"/>
-              <a:t> est un ensemble d'outils conçus pour aider les développeurs à exécuter leurs modèles sur des appareils mobiles, intégrés et IoT afin d'apporter le ML embarqué</a:t>
-            </a:r>
-          </a:p>
-          <a:p>
-            <a:r>
-              <a:rPr lang="fr-FR" dirty="0"/>
-              <a:t>Facebook</a:t>
-            </a:r>
-          </a:p>
-        </p:txBody>
-      </p:sp>
-      <p:pic>
-        <p:nvPicPr>
-          <p:cNvPr id="6" name="Image 5">
+              <a:rPr lang="fr-FR" dirty="0"/>
+              <a:t>Les réseaux de neurones et les Random Forest sont des modèles connexionnistes</a:t>
+            </a:r>
+          </a:p>
+          <a:p>
+            <a:pPr lvl="1"/>
+            <a:r>
+              <a:rPr lang="fr-FR" dirty="0"/>
+              <a:t>De simples graphes ou arbres</a:t>
+            </a:r>
+          </a:p>
+          <a:p>
+            <a:pPr lvl="1"/>
+            <a:r>
+              <a:rPr lang="fr-FR" dirty="0"/>
+              <a:t>Il semble facile de les convertir en schéma logique puis physique</a:t>
+            </a:r>
+          </a:p>
+          <a:p>
+            <a:pPr lvl="1"/>
+            <a:endParaRPr lang="fr-FR" dirty="0"/>
+          </a:p>
+        </p:txBody>
+      </p:sp>
+    </p:spTree>
+    <p:extLst>
+      <p:ext uri="{BB962C8B-B14F-4D97-AF65-F5344CB8AC3E}">
+        <p14:creationId xmlns:p14="http://schemas.microsoft.com/office/powerpoint/2010/main" val="4029350153"/>
+      </p:ext>
+    </p:extLst>
+  </p:cSld>
+  <p:clrMapOvr>
+    <a:masterClrMapping/>
+  </p:clrMapOvr>
+</p:sld>
+</file>
+
+<file path=ppt/slides/slide20.xml><?xml version="1.0" encoding="utf-8"?>
+<p:sld xmlns:a="http://schemas.openxmlformats.org/drawingml/2006/main" xmlns:r="http://schemas.openxmlformats.org/officeDocument/2006/relationships" xmlns:p="http://schemas.openxmlformats.org/presentationml/2006/main">
+  <p:cSld>
+    <p:spTree>
+      <p:nvGrpSpPr>
+        <p:cNvPr id="1" name=""/>
+        <p:cNvGrpSpPr/>
+        <p:nvPr/>
+      </p:nvGrpSpPr>
+      <p:grpSpPr>
+        <a:xfrm>
+          <a:off x="0" y="0"/>
+          <a:ext cx="0" cy="0"/>
+          <a:chOff x="0" y="0"/>
+          <a:chExt cx="0" cy="0"/>
+        </a:xfrm>
+      </p:grpSpPr>
+      <p:sp>
+        <p:nvSpPr>
+          <p:cNvPr id="2" name="Titre 1">
             <a:extLst>
               <a:ext uri="{FF2B5EF4-FFF2-40B4-BE49-F238E27FC236}">
-                <a16:creationId xmlns:a16="http://schemas.microsoft.com/office/drawing/2014/main" id="{90DB3575-6C95-48D7-C1D5-ABFC8973882C}"/>
+                <a16:creationId xmlns:a16="http://schemas.microsoft.com/office/drawing/2014/main" id="{5A712845-BBC0-3174-E7C7-DF622575A5D3}"/>
               </a:ext>
             </a:extLst>
           </p:cNvPr>
-          <p:cNvPicPr>
-            <a:picLocks noChangeAspect="1"/>
-          </p:cNvPicPr>
-          <p:nvPr/>
-        </p:nvPicPr>
-        <p:blipFill>
-          <a:blip r:embed="rId2"/>
-          <a:stretch>
-            <a:fillRect/>
-          </a:stretch>
-        </p:blipFill>
-        <p:spPr>
-          <a:xfrm>
-            <a:off x="6732240" y="0"/>
-            <a:ext cx="1077443" cy="1138512"/>
-          </a:xfrm>
-          <a:prstGeom prst="rect">
-            <a:avLst/>
-          </a:prstGeom>
-        </p:spPr>
-      </p:pic>
+          <p:cNvSpPr>
+            <a:spLocks noGrp="1"/>
+          </p:cNvSpPr>
+          <p:nvPr>
+            <p:ph type="title"/>
+          </p:nvPr>
+        </p:nvSpPr>
+        <p:spPr/>
+        <p:txBody>
+          <a:bodyPr/>
+          <a:lstStyle/>
+          <a:p>
+            <a:r>
+              <a:rPr lang="fr-FR" dirty="0"/>
+              <a:t>AMD Quark</a:t>
+            </a:r>
+          </a:p>
+        </p:txBody>
+      </p:sp>
+      <p:sp>
+        <p:nvSpPr>
+          <p:cNvPr id="3" name="Espace réservé du contenu 2">
+            <a:extLst>
+              <a:ext uri="{FF2B5EF4-FFF2-40B4-BE49-F238E27FC236}">
+                <a16:creationId xmlns:a16="http://schemas.microsoft.com/office/drawing/2014/main" id="{482E94C2-0FCA-33B7-DC3B-DCB6038C466E}"/>
+              </a:ext>
+            </a:extLst>
+          </p:cNvPr>
+          <p:cNvSpPr>
+            <a:spLocks noGrp="1"/>
+          </p:cNvSpPr>
+          <p:nvPr>
+            <p:ph idx="1"/>
+          </p:nvPr>
+        </p:nvSpPr>
+        <p:spPr/>
+        <p:txBody>
+          <a:bodyPr/>
+          <a:lstStyle/>
+          <a:p>
+            <a:r>
+              <a:rPr lang="fr-FR" dirty="0"/>
+              <a:t>AMD Quark est un toolkit complet multi‑plateforme conçu pour simplifier et améliorer la quantification des modèles de DL</a:t>
+            </a:r>
+          </a:p>
+          <a:p>
+            <a:r>
+              <a:rPr lang="fr-FR" dirty="0"/>
+              <a:t>Prenant en charge à la fois les modèles </a:t>
+            </a:r>
+            <a:r>
+              <a:rPr lang="fr-FR" dirty="0" err="1"/>
+              <a:t>PyTorch</a:t>
+            </a:r>
+            <a:r>
+              <a:rPr lang="fr-FR" dirty="0"/>
+              <a:t> et ONNX, AMD Quark permet aux développeurs d’optimiser leurs modèles pour un déploiement sur un large éventail de cibles matérielles, en obtenant des gains de performance significatifs sans compromettre la précision</a:t>
+            </a:r>
+          </a:p>
+        </p:txBody>
+      </p:sp>
     </p:spTree>
     <p:extLst>
       <p:ext uri="{BB962C8B-B14F-4D97-AF65-F5344CB8AC3E}">
-        <p14:creationId xmlns:p14="http://schemas.microsoft.com/office/powerpoint/2010/main" val="525628544"/>
+        <p14:creationId xmlns:p14="http://schemas.microsoft.com/office/powerpoint/2010/main" val="3783609057"/>
+      </p:ext>
+    </p:extLst>
+  </p:cSld>
+  <p:clrMapOvr>
+    <a:masterClrMapping/>
+  </p:clrMapOvr>
+</p:sld>
+</file>
+
+<file path=ppt/slides/slide21.xml><?xml version="1.0" encoding="utf-8"?>
+<p:sld xmlns:a="http://schemas.openxmlformats.org/drawingml/2006/main" xmlns:r="http://schemas.openxmlformats.org/officeDocument/2006/relationships" xmlns:p="http://schemas.openxmlformats.org/presentationml/2006/main">
+  <p:cSld>
+    <p:spTree>
+      <p:nvGrpSpPr>
+        <p:cNvPr id="1" name=""/>
+        <p:cNvGrpSpPr/>
+        <p:nvPr/>
+      </p:nvGrpSpPr>
+      <p:grpSpPr>
+        <a:xfrm>
+          <a:off x="0" y="0"/>
+          <a:ext cx="0" cy="0"/>
+          <a:chOff x="0" y="0"/>
+          <a:chExt cx="0" cy="0"/>
+        </a:xfrm>
+      </p:grpSpPr>
+      <p:sp>
+        <p:nvSpPr>
+          <p:cNvPr id="2" name="Titre 1">
+            <a:extLst>
+              <a:ext uri="{FF2B5EF4-FFF2-40B4-BE49-F238E27FC236}">
+                <a16:creationId xmlns:a16="http://schemas.microsoft.com/office/drawing/2014/main" id="{787AA94C-25BA-AC27-A44C-F3EE163ABFA0}"/>
+              </a:ext>
+            </a:extLst>
+          </p:cNvPr>
+          <p:cNvSpPr>
+            <a:spLocks noGrp="1"/>
+          </p:cNvSpPr>
+          <p:nvPr>
+            <p:ph type="title"/>
+          </p:nvPr>
+        </p:nvSpPr>
+        <p:spPr/>
+        <p:txBody>
+          <a:bodyPr/>
+          <a:lstStyle/>
+          <a:p>
+            <a:endParaRPr lang="fr-FR"/>
+          </a:p>
+        </p:txBody>
+      </p:sp>
+      <p:sp>
+        <p:nvSpPr>
+          <p:cNvPr id="3" name="Espace réservé du contenu 2">
+            <a:extLst>
+              <a:ext uri="{FF2B5EF4-FFF2-40B4-BE49-F238E27FC236}">
+                <a16:creationId xmlns:a16="http://schemas.microsoft.com/office/drawing/2014/main" id="{3BD6223A-8759-83E0-4A49-426B6123F674}"/>
+              </a:ext>
+            </a:extLst>
+          </p:cNvPr>
+          <p:cNvSpPr>
+            <a:spLocks noGrp="1"/>
+          </p:cNvSpPr>
+          <p:nvPr>
+            <p:ph idx="1"/>
+          </p:nvPr>
+        </p:nvSpPr>
+        <p:spPr/>
+        <p:txBody>
+          <a:bodyPr/>
+          <a:lstStyle/>
+          <a:p>
+            <a:r>
+              <a:rPr lang="fr-FR" b="1" dirty="0"/>
+              <a:t>Stack recommandée : Xilinx Vitis AI + Docker</a:t>
+            </a:r>
+          </a:p>
+          <a:p>
+            <a:r>
+              <a:rPr lang="fr-FR" dirty="0"/>
+              <a:t>.h5 / .</a:t>
+            </a:r>
+            <a:r>
+              <a:rPr lang="fr-FR" dirty="0" err="1"/>
+              <a:t>pth</a:t>
+            </a:r>
+            <a:endParaRPr lang="fr-FR" dirty="0"/>
+          </a:p>
+          <a:p>
+            <a:r>
+              <a:rPr lang="fr-FR" dirty="0"/>
+              <a:t>    → ONNX</a:t>
+            </a:r>
+          </a:p>
+          <a:p>
+            <a:r>
+              <a:rPr lang="fr-FR" dirty="0"/>
+              <a:t>        → Vitis AI </a:t>
+            </a:r>
+            <a:r>
+              <a:rPr lang="fr-FR" dirty="0" err="1"/>
+              <a:t>Quantizer</a:t>
+            </a:r>
+            <a:r>
+              <a:rPr lang="fr-FR" dirty="0"/>
+              <a:t> (INT8)</a:t>
+            </a:r>
+          </a:p>
+          <a:p>
+            <a:r>
+              <a:rPr lang="fr-FR" dirty="0"/>
+              <a:t>            → Vitis AI Compiler</a:t>
+            </a:r>
+          </a:p>
+          <a:p>
+            <a:r>
+              <a:rPr lang="fr-FR" dirty="0"/>
+              <a:t>                → Simulation sur </a:t>
+            </a:r>
+            <a:r>
+              <a:rPr lang="fr-FR" dirty="0" err="1"/>
+              <a:t>xmodel</a:t>
+            </a:r>
+            <a:endParaRPr lang="fr-FR" dirty="0"/>
+          </a:p>
+          <a:p>
+            <a:r>
+              <a:rPr lang="fr-FR" b="1" dirty="0"/>
+              <a:t>Installation sur Windows</a:t>
+            </a:r>
+          </a:p>
+          <a:p>
+            <a:endParaRPr lang="fr-FR" dirty="0"/>
+          </a:p>
+        </p:txBody>
+      </p:sp>
+    </p:spTree>
+    <p:extLst>
+      <p:ext uri="{BB962C8B-B14F-4D97-AF65-F5344CB8AC3E}">
+        <p14:creationId xmlns:p14="http://schemas.microsoft.com/office/powerpoint/2010/main" val="3412424550"/>
+      </p:ext>
+    </p:extLst>
+  </p:cSld>
+  <p:clrMapOvr>
+    <a:masterClrMapping/>
+  </p:clrMapOvr>
+</p:sld>
+</file>
+
+<file path=ppt/slides/slide22.xml><?xml version="1.0" encoding="utf-8"?>
+<p:sld xmlns:a="http://schemas.openxmlformats.org/drawingml/2006/main" xmlns:r="http://schemas.openxmlformats.org/officeDocument/2006/relationships" xmlns:p="http://schemas.openxmlformats.org/presentationml/2006/main">
+  <p:cSld>
+    <p:spTree>
+      <p:nvGrpSpPr>
+        <p:cNvPr id="1" name=""/>
+        <p:cNvGrpSpPr/>
+        <p:nvPr/>
+      </p:nvGrpSpPr>
+      <p:grpSpPr>
+        <a:xfrm>
+          <a:off x="0" y="0"/>
+          <a:ext cx="0" cy="0"/>
+          <a:chOff x="0" y="0"/>
+          <a:chExt cx="0" cy="0"/>
+        </a:xfrm>
+      </p:grpSpPr>
+      <p:sp>
+        <p:nvSpPr>
+          <p:cNvPr id="2" name="Titre 1">
+            <a:extLst>
+              <a:ext uri="{FF2B5EF4-FFF2-40B4-BE49-F238E27FC236}">
+                <a16:creationId xmlns:a16="http://schemas.microsoft.com/office/drawing/2014/main" id="{A1BACD3C-F381-DE7D-418A-6256E25D3895}"/>
+              </a:ext>
+            </a:extLst>
+          </p:cNvPr>
+          <p:cNvSpPr>
+            <a:spLocks noGrp="1"/>
+          </p:cNvSpPr>
+          <p:nvPr>
+            <p:ph type="title"/>
+          </p:nvPr>
+        </p:nvSpPr>
+        <p:spPr/>
+        <p:txBody>
+          <a:bodyPr/>
+          <a:lstStyle/>
+          <a:p>
+            <a:endParaRPr lang="fr-FR"/>
+          </a:p>
+        </p:txBody>
+      </p:sp>
+      <p:sp>
+        <p:nvSpPr>
+          <p:cNvPr id="3" name="Espace réservé du contenu 2">
+            <a:extLst>
+              <a:ext uri="{FF2B5EF4-FFF2-40B4-BE49-F238E27FC236}">
+                <a16:creationId xmlns:a16="http://schemas.microsoft.com/office/drawing/2014/main" id="{69D145C8-41F3-9CDC-CB8E-3439EDD989A6}"/>
+              </a:ext>
+            </a:extLst>
+          </p:cNvPr>
+          <p:cNvSpPr>
+            <a:spLocks noGrp="1"/>
+          </p:cNvSpPr>
+          <p:nvPr>
+            <p:ph idx="1"/>
+          </p:nvPr>
+        </p:nvSpPr>
+        <p:spPr/>
+        <p:txBody>
+          <a:bodyPr/>
+          <a:lstStyle/>
+          <a:p>
+            <a:r>
+              <a:rPr lang="fr-FR" dirty="0"/>
+              <a:t># Installe Docker Desktop</a:t>
+            </a:r>
+          </a:p>
+          <a:p>
+            <a:r>
+              <a:rPr lang="fr-FR" dirty="0"/>
+              <a:t># Puis pull l'image Vitis AI</a:t>
+            </a:r>
+          </a:p>
+          <a:p>
+            <a:r>
+              <a:rPr lang="fr-FR" dirty="0"/>
+              <a:t>docker pull </a:t>
+            </a:r>
+            <a:r>
+              <a:rPr lang="fr-FR" dirty="0" err="1"/>
+              <a:t>xilinx</a:t>
+            </a:r>
+            <a:r>
+              <a:rPr lang="fr-FR" dirty="0"/>
+              <a:t>/</a:t>
+            </a:r>
+            <a:r>
+              <a:rPr lang="fr-FR" dirty="0" err="1"/>
+              <a:t>vitis-ai-cpu:latest</a:t>
+            </a:r>
+            <a:endParaRPr lang="fr-FR" dirty="0"/>
+          </a:p>
+          <a:p>
+            <a:r>
+              <a:rPr lang="fr-FR" dirty="0"/>
+              <a:t>docker run -</a:t>
+            </a:r>
+            <a:r>
+              <a:rPr lang="fr-FR" dirty="0" err="1"/>
+              <a:t>it</a:t>
+            </a:r>
+            <a:r>
+              <a:rPr lang="fr-FR" dirty="0"/>
+              <a:t> </a:t>
+            </a:r>
+            <a:r>
+              <a:rPr lang="fr-FR" dirty="0" err="1"/>
+              <a:t>xilinx</a:t>
+            </a:r>
+            <a:r>
+              <a:rPr lang="fr-FR" dirty="0"/>
+              <a:t>/</a:t>
+            </a:r>
+            <a:r>
+              <a:rPr lang="fr-FR" dirty="0" err="1"/>
+              <a:t>vitis-ai-cpu:latest</a:t>
+            </a:r>
+            <a:endParaRPr lang="fr-FR" dirty="0"/>
+          </a:p>
+        </p:txBody>
+      </p:sp>
+    </p:spTree>
+    <p:extLst>
+      <p:ext uri="{BB962C8B-B14F-4D97-AF65-F5344CB8AC3E}">
+        <p14:creationId xmlns:p14="http://schemas.microsoft.com/office/powerpoint/2010/main" val="568035009"/>
+      </p:ext>
+    </p:extLst>
+  </p:cSld>
+  <p:clrMapOvr>
+    <a:masterClrMapping/>
+  </p:clrMapOvr>
+</p:sld>
+</file>
+
+<file path=ppt/slides/slide23.xml><?xml version="1.0" encoding="utf-8"?>
+<p:sld xmlns:a="http://schemas.openxmlformats.org/drawingml/2006/main" xmlns:r="http://schemas.openxmlformats.org/officeDocument/2006/relationships" xmlns:p="http://schemas.openxmlformats.org/presentationml/2006/main">
+  <p:cSld>
+    <p:spTree>
+      <p:nvGrpSpPr>
+        <p:cNvPr id="1" name=""/>
+        <p:cNvGrpSpPr/>
+        <p:nvPr/>
+      </p:nvGrpSpPr>
+      <p:grpSpPr>
+        <a:xfrm>
+          <a:off x="0" y="0"/>
+          <a:ext cx="0" cy="0"/>
+          <a:chOff x="0" y="0"/>
+          <a:chExt cx="0" cy="0"/>
+        </a:xfrm>
+      </p:grpSpPr>
+      <p:sp>
+        <p:nvSpPr>
+          <p:cNvPr id="2" name="Titre 1">
+            <a:extLst>
+              <a:ext uri="{FF2B5EF4-FFF2-40B4-BE49-F238E27FC236}">
+                <a16:creationId xmlns:a16="http://schemas.microsoft.com/office/drawing/2014/main" id="{937DEE62-367C-3C73-947B-7C78AF0974EF}"/>
+              </a:ext>
+            </a:extLst>
+          </p:cNvPr>
+          <p:cNvSpPr>
+            <a:spLocks noGrp="1"/>
+          </p:cNvSpPr>
+          <p:nvPr>
+            <p:ph type="title"/>
+          </p:nvPr>
+        </p:nvSpPr>
+        <p:spPr/>
+        <p:txBody>
+          <a:bodyPr/>
+          <a:lstStyle/>
+          <a:p>
+            <a:endParaRPr lang="fr-FR"/>
+          </a:p>
+        </p:txBody>
+      </p:sp>
+      <p:sp>
+        <p:nvSpPr>
+          <p:cNvPr id="3" name="Espace réservé du contenu 2">
+            <a:extLst>
+              <a:ext uri="{FF2B5EF4-FFF2-40B4-BE49-F238E27FC236}">
+                <a16:creationId xmlns:a16="http://schemas.microsoft.com/office/drawing/2014/main" id="{D551B990-F0B7-71EE-48E3-C4141D648309}"/>
+              </a:ext>
+            </a:extLst>
+          </p:cNvPr>
+          <p:cNvSpPr>
+            <a:spLocks noGrp="1"/>
+          </p:cNvSpPr>
+          <p:nvPr>
+            <p:ph idx="1"/>
+          </p:nvPr>
+        </p:nvSpPr>
+        <p:spPr/>
+        <p:txBody>
+          <a:bodyPr/>
+          <a:lstStyle/>
+          <a:p>
+            <a:r>
+              <a:rPr lang="fr-FR" sz="2000" dirty="0"/>
+              <a:t># </a:t>
+            </a:r>
+            <a:r>
+              <a:rPr lang="fr-FR" sz="2000" dirty="0" err="1"/>
+              <a:t>Quantisation</a:t>
+            </a:r>
+            <a:r>
+              <a:rPr lang="fr-FR" sz="2000" dirty="0"/>
+              <a:t> INT8</a:t>
+            </a:r>
+          </a:p>
+          <a:p>
+            <a:r>
+              <a:rPr lang="fr-FR" sz="2000" dirty="0" err="1"/>
+              <a:t>vai_q_onnx</a:t>
+            </a:r>
+            <a:r>
+              <a:rPr lang="fr-FR" sz="2000" dirty="0"/>
+              <a:t> </a:t>
+            </a:r>
+            <a:r>
+              <a:rPr lang="fr-FR" sz="2000" dirty="0" err="1"/>
+              <a:t>quantize</a:t>
+            </a:r>
+            <a:r>
+              <a:rPr lang="fr-FR" sz="2000" dirty="0"/>
+              <a:t> \</a:t>
+            </a:r>
+          </a:p>
+          <a:p>
+            <a:r>
+              <a:rPr lang="fr-FR" sz="2000" dirty="0"/>
+              <a:t>  --</a:t>
+            </a:r>
+            <a:r>
+              <a:rPr lang="fr-FR" sz="2000" dirty="0" err="1"/>
+              <a:t>input_model</a:t>
+            </a:r>
+            <a:r>
+              <a:rPr lang="fr-FR" sz="2000" dirty="0"/>
+              <a:t> </a:t>
+            </a:r>
+            <a:r>
+              <a:rPr lang="fr-FR" sz="2000" dirty="0" err="1"/>
+              <a:t>wdbc.onnx</a:t>
+            </a:r>
+            <a:r>
+              <a:rPr lang="fr-FR" sz="2000" dirty="0"/>
+              <a:t> \</a:t>
+            </a:r>
+          </a:p>
+          <a:p>
+            <a:r>
+              <a:rPr lang="fr-FR" sz="2000" dirty="0"/>
+              <a:t>  --</a:t>
+            </a:r>
+            <a:r>
+              <a:rPr lang="fr-FR" sz="2000" dirty="0" err="1"/>
+              <a:t>output_model</a:t>
+            </a:r>
+            <a:r>
+              <a:rPr lang="fr-FR" sz="2000" dirty="0"/>
+              <a:t> </a:t>
+            </a:r>
+            <a:r>
+              <a:rPr lang="fr-FR" sz="2000" dirty="0" err="1"/>
+              <a:t>wdbc_quant.onnx</a:t>
+            </a:r>
+            <a:r>
+              <a:rPr lang="fr-FR" sz="2000" dirty="0"/>
+              <a:t> \</a:t>
+            </a:r>
+          </a:p>
+          <a:p>
+            <a:r>
+              <a:rPr lang="fr-FR" sz="2000" dirty="0"/>
+              <a:t>  --</a:t>
+            </a:r>
+            <a:r>
+              <a:rPr lang="fr-FR" sz="2000" dirty="0" err="1"/>
+              <a:t>calibration_data_reader</a:t>
+            </a:r>
+            <a:r>
+              <a:rPr lang="fr-FR" sz="2000" dirty="0"/>
+              <a:t> calibration.py</a:t>
+            </a:r>
+          </a:p>
+          <a:p>
+            <a:endParaRPr lang="fr-FR" sz="2000" dirty="0"/>
+          </a:p>
+          <a:p>
+            <a:r>
+              <a:rPr lang="fr-FR" sz="2000" dirty="0"/>
+              <a:t># Compilation pour DPU (le NPU des </a:t>
+            </a:r>
+            <a:r>
+              <a:rPr lang="fr-FR" sz="2000" dirty="0" err="1"/>
+              <a:t>Zynq</a:t>
+            </a:r>
+            <a:r>
+              <a:rPr lang="fr-FR" sz="2000" dirty="0"/>
+              <a:t>)</a:t>
+            </a:r>
+          </a:p>
+          <a:p>
+            <a:r>
+              <a:rPr lang="fr-FR" sz="2000" dirty="0" err="1"/>
+              <a:t>vai_c_onnx</a:t>
+            </a:r>
+            <a:r>
+              <a:rPr lang="fr-FR" sz="2000" dirty="0"/>
+              <a:t> \</a:t>
+            </a:r>
+          </a:p>
+          <a:p>
+            <a:r>
+              <a:rPr lang="fr-FR" sz="2000" dirty="0"/>
+              <a:t>  --input </a:t>
+            </a:r>
+            <a:r>
+              <a:rPr lang="fr-FR" sz="2000" dirty="0" err="1"/>
+              <a:t>wdbc_quant.onnx</a:t>
+            </a:r>
+            <a:r>
+              <a:rPr lang="fr-FR" sz="2000" dirty="0"/>
+              <a:t> \</a:t>
+            </a:r>
+          </a:p>
+          <a:p>
+            <a:r>
+              <a:rPr lang="fr-FR" sz="2000" dirty="0"/>
+              <a:t>  --</a:t>
+            </a:r>
+            <a:r>
+              <a:rPr lang="fr-FR" sz="2000" dirty="0" err="1"/>
+              <a:t>arch</a:t>
+            </a:r>
+            <a:r>
+              <a:rPr lang="fr-FR" sz="2000" dirty="0"/>
+              <a:t> /</a:t>
+            </a:r>
+            <a:r>
+              <a:rPr lang="fr-FR" sz="2000" dirty="0" err="1"/>
+              <a:t>opt</a:t>
+            </a:r>
+            <a:r>
+              <a:rPr lang="fr-FR" sz="2000" dirty="0"/>
+              <a:t>/</a:t>
+            </a:r>
+            <a:r>
+              <a:rPr lang="fr-FR" sz="2000" dirty="0" err="1"/>
+              <a:t>vitis_ai</a:t>
+            </a:r>
+            <a:r>
+              <a:rPr lang="fr-FR" sz="2000" dirty="0"/>
+              <a:t>/compiler/</a:t>
+            </a:r>
+            <a:r>
+              <a:rPr lang="fr-FR" sz="2000" dirty="0" err="1"/>
+              <a:t>arch</a:t>
+            </a:r>
+            <a:r>
+              <a:rPr lang="fr-FR" sz="2000" dirty="0"/>
+              <a:t>/DPUCZDX8G/ZCU102/</a:t>
+            </a:r>
+            <a:r>
+              <a:rPr lang="fr-FR" sz="2000" dirty="0" err="1"/>
+              <a:t>arch.json</a:t>
+            </a:r>
+            <a:r>
+              <a:rPr lang="fr-FR" sz="2000" dirty="0"/>
+              <a:t> \</a:t>
+            </a:r>
+          </a:p>
+          <a:p>
+            <a:r>
+              <a:rPr lang="fr-FR" sz="2000" dirty="0"/>
+              <a:t>  --</a:t>
+            </a:r>
+            <a:r>
+              <a:rPr lang="fr-FR" sz="2000" dirty="0" err="1"/>
+              <a:t>output_dir</a:t>
+            </a:r>
+            <a:r>
+              <a:rPr lang="fr-FR" sz="2000" dirty="0"/>
+              <a:t> . \</a:t>
+            </a:r>
+          </a:p>
+          <a:p>
+            <a:r>
+              <a:rPr lang="fr-FR" sz="2000" dirty="0"/>
+              <a:t>  --</a:t>
+            </a:r>
+            <a:r>
+              <a:rPr lang="fr-FR" sz="2000" dirty="0" err="1"/>
+              <a:t>net_name</a:t>
+            </a:r>
+            <a:r>
+              <a:rPr lang="fr-FR" sz="2000" dirty="0"/>
+              <a:t> </a:t>
+            </a:r>
+            <a:r>
+              <a:rPr lang="fr-FR" sz="2000" dirty="0" err="1"/>
+              <a:t>wdbc</a:t>
+            </a:r>
+            <a:endParaRPr lang="fr-FR" sz="2000" dirty="0"/>
+          </a:p>
+        </p:txBody>
+      </p:sp>
+    </p:spTree>
+    <p:extLst>
+      <p:ext uri="{BB962C8B-B14F-4D97-AF65-F5344CB8AC3E}">
+        <p14:creationId xmlns:p14="http://schemas.microsoft.com/office/powerpoint/2010/main" val="741439863"/>
+      </p:ext>
+    </p:extLst>
+  </p:cSld>
+  <p:clrMapOvr>
+    <a:masterClrMapping/>
+  </p:clrMapOvr>
+</p:sld>
+</file>
+
+<file path=ppt/slides/slide24.xml><?xml version="1.0" encoding="utf-8"?>
+<p:sld xmlns:a="http://schemas.openxmlformats.org/drawingml/2006/main" xmlns:r="http://schemas.openxmlformats.org/officeDocument/2006/relationships" xmlns:p="http://schemas.openxmlformats.org/presentationml/2006/main">
+  <p:cSld>
+    <p:spTree>
+      <p:nvGrpSpPr>
+        <p:cNvPr id="1" name=""/>
+        <p:cNvGrpSpPr/>
+        <p:nvPr/>
+      </p:nvGrpSpPr>
+      <p:grpSpPr>
+        <a:xfrm>
+          <a:off x="0" y="0"/>
+          <a:ext cx="0" cy="0"/>
+          <a:chOff x="0" y="0"/>
+          <a:chExt cx="0" cy="0"/>
+        </a:xfrm>
+      </p:grpSpPr>
+      <p:sp>
+        <p:nvSpPr>
+          <p:cNvPr id="2" name="Titre 1">
+            <a:extLst>
+              <a:ext uri="{FF2B5EF4-FFF2-40B4-BE49-F238E27FC236}">
+                <a16:creationId xmlns:a16="http://schemas.microsoft.com/office/drawing/2014/main" id="{EA6C9AD1-3BE1-4FFE-54C4-D922DF45D70E}"/>
+              </a:ext>
+            </a:extLst>
+          </p:cNvPr>
+          <p:cNvSpPr>
+            <a:spLocks noGrp="1"/>
+          </p:cNvSpPr>
+          <p:nvPr>
+            <p:ph type="title"/>
+          </p:nvPr>
+        </p:nvSpPr>
+        <p:spPr/>
+        <p:txBody>
+          <a:bodyPr/>
+          <a:lstStyle/>
+          <a:p>
+            <a:endParaRPr lang="fr-FR"/>
+          </a:p>
+        </p:txBody>
+      </p:sp>
+      <p:sp>
+        <p:nvSpPr>
+          <p:cNvPr id="3" name="Espace réservé du contenu 2">
+            <a:extLst>
+              <a:ext uri="{FF2B5EF4-FFF2-40B4-BE49-F238E27FC236}">
+                <a16:creationId xmlns:a16="http://schemas.microsoft.com/office/drawing/2014/main" id="{FCF528D6-C58D-10F7-8DDB-2E57C8BD0524}"/>
+              </a:ext>
+            </a:extLst>
+          </p:cNvPr>
+          <p:cNvSpPr>
+            <a:spLocks noGrp="1"/>
+          </p:cNvSpPr>
+          <p:nvPr>
+            <p:ph idx="1"/>
+          </p:nvPr>
+        </p:nvSpPr>
+        <p:spPr/>
+        <p:txBody>
+          <a:bodyPr/>
+          <a:lstStyle/>
+          <a:p>
+            <a:r>
+              <a:rPr lang="fr-FR" dirty="0"/>
+              <a:t># Vitis AI fournit un simulateur du DPU </a:t>
+            </a:r>
+            <a:r>
+              <a:rPr lang="fr-FR" dirty="0" err="1"/>
+              <a:t>xdputil</a:t>
+            </a:r>
+            <a:r>
+              <a:rPr lang="fr-FR" dirty="0"/>
+              <a:t> benchmark </a:t>
+            </a:r>
+            <a:r>
+              <a:rPr lang="fr-FR" dirty="0" err="1"/>
+              <a:t>wdbc.xmodel</a:t>
+            </a:r>
+            <a:r>
+              <a:rPr lang="fr-FR" dirty="0"/>
+              <a:t> -i 1000</a:t>
+            </a:r>
+          </a:p>
+        </p:txBody>
+      </p:sp>
+    </p:spTree>
+    <p:extLst>
+      <p:ext uri="{BB962C8B-B14F-4D97-AF65-F5344CB8AC3E}">
+        <p14:creationId xmlns:p14="http://schemas.microsoft.com/office/powerpoint/2010/main" val="2079497255"/>
       </p:ext>
     </p:extLst>
   </p:cSld>
@@ -5192,7 +6085,7 @@
           <p:cNvPr id="2" name="Titre 1">
             <a:extLst>
               <a:ext uri="{FF2B5EF4-FFF2-40B4-BE49-F238E27FC236}">
-                <a16:creationId xmlns:a16="http://schemas.microsoft.com/office/drawing/2014/main" id="{2CA57FC1-FD72-8E1A-DCE7-39F0620BE002}"/>
+                <a16:creationId xmlns:a16="http://schemas.microsoft.com/office/drawing/2014/main" id="{ABF4F64B-0E54-AAD5-8E7A-2E9A67313A6F}"/>
               </a:ext>
             </a:extLst>
           </p:cNvPr>
@@ -5210,7 +6103,7 @@
           <a:p>
             <a:r>
               <a:rPr lang="fr-FR" dirty="0"/>
-              <a:t>Contraintes</a:t>
+              <a:t>FPGA</a:t>
             </a:r>
           </a:p>
         </p:txBody>
@@ -5220,7 +6113,7 @@
           <p:cNvPr id="3" name="Espace réservé du contenu 2">
             <a:extLst>
               <a:ext uri="{FF2B5EF4-FFF2-40B4-BE49-F238E27FC236}">
-                <a16:creationId xmlns:a16="http://schemas.microsoft.com/office/drawing/2014/main" id="{9B19EF08-17C8-5AA4-7FBD-C51BF74D23A8}"/>
+                <a16:creationId xmlns:a16="http://schemas.microsoft.com/office/drawing/2014/main" id="{32665C48-7451-5F2C-A5F9-BE19BF082762}"/>
               </a:ext>
             </a:extLst>
           </p:cNvPr>
@@ -5238,77 +6131,82 @@
           <a:p>
             <a:r>
               <a:rPr lang="fr-FR" dirty="0"/>
-              <a:t>Latence</a:t>
+              <a:t>Un PLD (Programmable </a:t>
+            </a:r>
+            <a:r>
+              <a:rPr lang="fr-FR" dirty="0" err="1"/>
+              <a:t>Logical</a:t>
+            </a:r>
+            <a:r>
+              <a:rPr lang="fr-FR" dirty="0"/>
+              <a:t> </a:t>
+            </a:r>
+            <a:r>
+              <a:rPr lang="fr-FR" dirty="0" err="1"/>
+              <a:t>Device</a:t>
+            </a:r>
+            <a:r>
+              <a:rPr lang="fr-FR" dirty="0"/>
+              <a:t>) est un circuit logique programmable qui peut être programmé après sa fabrication</a:t>
+            </a:r>
+          </a:p>
+          <a:p>
+            <a:r>
+              <a:rPr lang="fr-FR" dirty="0"/>
+              <a:t>Un Field Programmable </a:t>
+            </a:r>
+            <a:r>
+              <a:rPr lang="fr-FR" dirty="0" err="1"/>
+              <a:t>Gate</a:t>
+            </a:r>
+            <a:r>
+              <a:rPr lang="fr-FR" dirty="0"/>
+              <a:t> </a:t>
+            </a:r>
+            <a:r>
+              <a:rPr lang="fr-FR" dirty="0" err="1"/>
+              <a:t>Array</a:t>
+            </a:r>
+            <a:r>
+              <a:rPr lang="fr-FR" dirty="0"/>
+              <a:t> est un PLD qui contient :</a:t>
             </a:r>
           </a:p>
           <a:p>
             <a:pPr lvl="1"/>
             <a:r>
               <a:rPr lang="fr-FR" dirty="0"/>
-              <a:t>pas d'aller-retour avec un serveur</a:t>
-            </a:r>
-          </a:p>
-          <a:p>
-            <a:r>
-              <a:rPr lang="fr-FR" dirty="0"/>
-              <a:t>Confidentialité</a:t>
+              <a:t>des portes logiques librement interconnectables entre elles</a:t>
             </a:r>
           </a:p>
           <a:p>
             <a:pPr lvl="1"/>
             <a:r>
               <a:rPr lang="fr-FR" dirty="0"/>
-              <a:t>aucune donnée personnelle ne quitte l'appareil</a:t>
-            </a:r>
-          </a:p>
-          <a:p>
-            <a:r>
-              <a:rPr lang="fr-FR" dirty="0"/>
-              <a:t>Connectivité</a:t>
+              <a:t>des fonctions élémentaires (bascules flip-flop, LUT, Multiplexeurs, boucles à verrouillage de phase),</a:t>
             </a:r>
           </a:p>
           <a:p>
             <a:pPr lvl="1"/>
             <a:r>
               <a:rPr lang="fr-FR" dirty="0"/>
-              <a:t>aucune connexion Internet requise</a:t>
-            </a:r>
-          </a:p>
-          <a:p>
-            <a:r>
-              <a:rPr lang="fr-FR" dirty="0"/>
-              <a:t>taille</a:t>
-            </a:r>
-          </a:p>
-          <a:p>
-            <a:pPr lvl="1"/>
-            <a:r>
-              <a:rPr lang="fr-FR" dirty="0"/>
-              <a:t>modèle réduit et taille binaire</a:t>
-            </a:r>
-          </a:p>
-          <a:p>
-            <a:r>
-              <a:rPr lang="fr-FR" dirty="0"/>
-              <a:t>Consommation d'énergie</a:t>
-            </a:r>
-          </a:p>
-          <a:p>
-            <a:pPr lvl="1"/>
-            <a:r>
-              <a:rPr lang="fr-FR" dirty="0"/>
-              <a:t>inférence efficace et absence de connexions réseau</a:t>
-            </a:r>
-          </a:p>
-          <a:p>
-            <a:endParaRPr lang="fr-FR" dirty="0"/>
+              <a:t>des fonctions de traitement « précâblées » (DSP, protocoles de communication comme le </a:t>
+            </a:r>
+            <a:r>
+              <a:rPr lang="fr-FR" dirty="0" err="1"/>
+              <a:t>PCIe</a:t>
+            </a:r>
+            <a:r>
+              <a:rPr lang="fr-FR" dirty="0"/>
+              <a:t>, voire des fonctionnalités de microprocesseurs, de mémoire, etc.),</a:t>
+            </a:r>
           </a:p>
         </p:txBody>
       </p:sp>
     </p:spTree>
     <p:extLst>
       <p:ext uri="{BB962C8B-B14F-4D97-AF65-F5344CB8AC3E}">
-        <p14:creationId xmlns:p14="http://schemas.microsoft.com/office/powerpoint/2010/main" val="4137333182"/>
+        <p14:creationId xmlns:p14="http://schemas.microsoft.com/office/powerpoint/2010/main" val="3100984886"/>
       </p:ext>
     </p:extLst>
   </p:cSld>
@@ -5337,7 +6235,13 @@
       </p:grpSpPr>
       <p:sp>
         <p:nvSpPr>
-          <p:cNvPr id="2" name="Titre 1"/>
+          <p:cNvPr id="2" name="Titre 1">
+            <a:extLst>
+              <a:ext uri="{FF2B5EF4-FFF2-40B4-BE49-F238E27FC236}">
+                <a16:creationId xmlns:a16="http://schemas.microsoft.com/office/drawing/2014/main" id="{EDEAA3AE-EDFB-9F4F-E62E-4639E999F3DA}"/>
+              </a:ext>
+            </a:extLst>
+          </p:cNvPr>
           <p:cNvSpPr>
             <a:spLocks noGrp="1"/>
           </p:cNvSpPr>
@@ -5351,16 +6255,21 @@
           <a:lstStyle/>
           <a:p>
             <a:r>
-              <a:rPr lang="fr-FR" dirty="0" err="1"/>
-              <a:t>ExecuTorch</a:t>
-            </a:r>
-            <a:endParaRPr lang="fr-FR" dirty="0"/>
-          </a:p>
-        </p:txBody>
-      </p:sp>
-      <p:sp>
-        <p:nvSpPr>
-          <p:cNvPr id="3" name="Espace réservé du contenu 2"/>
+              <a:rPr lang="fr-FR" dirty="0"/>
+              <a:t>Avantages</a:t>
+            </a:r>
+          </a:p>
+        </p:txBody>
+      </p:sp>
+      <p:sp>
+        <p:nvSpPr>
+          <p:cNvPr id="3" name="Espace réservé du contenu 2">
+            <a:extLst>
+              <a:ext uri="{FF2B5EF4-FFF2-40B4-BE49-F238E27FC236}">
+                <a16:creationId xmlns:a16="http://schemas.microsoft.com/office/drawing/2014/main" id="{A6A281F3-D590-913F-F100-52C7AC219375}"/>
+              </a:ext>
+            </a:extLst>
+          </p:cNvPr>
           <p:cNvSpPr>
             <a:spLocks noGrp="1"/>
           </p:cNvSpPr>
@@ -5375,65 +6284,39 @@
           <a:p>
             <a:r>
               <a:rPr lang="fr-FR" dirty="0"/>
-              <a:t>Framework pour mobile et </a:t>
-            </a:r>
-            <a:r>
-              <a:rPr lang="fr-FR" dirty="0" err="1"/>
-              <a:t>IoT</a:t>
-            </a:r>
-            <a:endParaRPr lang="fr-FR" dirty="0"/>
-          </a:p>
-          <a:p>
-            <a:pPr lvl="1"/>
-            <a:r>
-              <a:rPr lang="fr-FR" dirty="0"/>
-              <a:t>Permet une utilisation plus légère de </a:t>
-            </a:r>
-            <a:r>
-              <a:rPr lang="fr-FR" dirty="0" err="1"/>
-              <a:t>PyTorch</a:t>
-            </a:r>
-            <a:endParaRPr lang="fr-FR" dirty="0"/>
-          </a:p>
-          <a:p>
-            <a:pPr lvl="1"/>
-            <a:r>
-              <a:rPr lang="fr-FR" dirty="0"/>
-              <a:t>Inférence</a:t>
-            </a:r>
-          </a:p>
-          <a:p>
-            <a:pPr lvl="1"/>
-            <a:r>
-              <a:rPr lang="fr-FR" dirty="0"/>
-              <a:t>32 bits (aucune différence significative avec </a:t>
-            </a:r>
-            <a:r>
-              <a:rPr lang="fr-FR" dirty="0" err="1"/>
-              <a:t>PyTorch</a:t>
-            </a:r>
-            <a:r>
-              <a:rPr lang="fr-FR" dirty="0"/>
-              <a:t> qui est en 64 bits)</a:t>
-            </a:r>
-          </a:p>
-          <a:p>
-            <a:pPr lvl="1"/>
-            <a:r>
-              <a:rPr lang="fr-FR" dirty="0"/>
-              <a:t>Implémentation Python, C++, Java, Android, Javascript, …</a:t>
-            </a:r>
-          </a:p>
-          <a:p>
-            <a:pPr lvl="1"/>
-            <a:endParaRPr lang="fr-FR" dirty="0"/>
+              <a:t>Un temps de traitement borné, c'est-à-dire une forte prédictibilité du temps de traitement, indépendamment de la programmation effectuée</a:t>
+            </a:r>
+          </a:p>
+          <a:p>
+            <a:r>
+              <a:rPr lang="fr-FR" dirty="0"/>
+              <a:t>Une robustesse de la programmation une fois programmée</a:t>
+            </a:r>
+          </a:p>
+          <a:p>
+            <a:r>
+              <a:rPr lang="fr-FR" dirty="0"/>
+              <a:t>La gestion d'entrées et sorties (I/O) potentiellement très nombreuses</a:t>
+            </a:r>
+          </a:p>
+          <a:p>
+            <a:r>
+              <a:rPr lang="fr-FR" dirty="0"/>
+              <a:t>Une faible consommation</a:t>
+            </a:r>
+          </a:p>
+          <a:p>
+            <a:r>
+              <a:rPr lang="fr-FR" dirty="0"/>
+              <a:t>Une latence faible</a:t>
+            </a:r>
           </a:p>
         </p:txBody>
       </p:sp>
     </p:spTree>
     <p:extLst>
       <p:ext uri="{BB962C8B-B14F-4D97-AF65-F5344CB8AC3E}">
-        <p14:creationId xmlns:p14="http://schemas.microsoft.com/office/powerpoint/2010/main" val="4102816871"/>
+        <p14:creationId xmlns:p14="http://schemas.microsoft.com/office/powerpoint/2010/main" val="3747575627"/>
       </p:ext>
     </p:extLst>
   </p:cSld>
@@ -5465,7 +6348,7 @@
           <p:cNvPr id="2" name="Titre 1">
             <a:extLst>
               <a:ext uri="{FF2B5EF4-FFF2-40B4-BE49-F238E27FC236}">
-                <a16:creationId xmlns:a16="http://schemas.microsoft.com/office/drawing/2014/main" id="{0619AE97-78FE-9D95-04F6-5151EE350D5C}"/>
+                <a16:creationId xmlns:a16="http://schemas.microsoft.com/office/drawing/2014/main" id="{F5ABB2C0-9BE5-12AE-B304-087103E24E83}"/>
               </a:ext>
             </a:extLst>
           </p:cNvPr>
@@ -5483,7 +6366,7 @@
           <a:p>
             <a:r>
               <a:rPr lang="fr-FR" dirty="0"/>
-              <a:t>Compatibilité</a:t>
+              <a:t>Programmation</a:t>
             </a:r>
           </a:p>
         </p:txBody>
@@ -5493,7 +6376,7 @@
           <p:cNvPr id="3" name="Espace réservé du contenu 2">
             <a:extLst>
               <a:ext uri="{FF2B5EF4-FFF2-40B4-BE49-F238E27FC236}">
-                <a16:creationId xmlns:a16="http://schemas.microsoft.com/office/drawing/2014/main" id="{919DCCFD-4793-B393-6BC1-4D23D1B0ADC4}"/>
+                <a16:creationId xmlns:a16="http://schemas.microsoft.com/office/drawing/2014/main" id="{B6430F7F-FE1F-8C26-5394-52CDACF19427}"/>
               </a:ext>
             </a:extLst>
           </p:cNvPr>
@@ -5511,28 +6394,21 @@
           <a:p>
             <a:r>
               <a:rPr lang="fr-FR" dirty="0"/>
-              <a:t>Compatibilité avec plusieurs plates-formes</a:t>
+              <a:t>La programmation des FPGA passe par un compilateur basé sur un langage de programmation de type langage de description matériel</a:t>
             </a:r>
           </a:p>
           <a:p>
             <a:pPr lvl="1"/>
             <a:r>
               <a:rPr lang="fr-FR" dirty="0"/>
-              <a:t>dont les appareils Android et iOS</a:t>
+              <a:t>VHDL </a:t>
             </a:r>
           </a:p>
           <a:p>
             <a:pPr lvl="1"/>
             <a:r>
               <a:rPr lang="fr-FR" dirty="0"/>
-              <a:t>les appareils avec système d'exploitation Linux intégré</a:t>
-            </a:r>
-          </a:p>
-          <a:p>
-            <a:pPr lvl="1"/>
-            <a:r>
-              <a:rPr lang="fr-FR" dirty="0"/>
-              <a:t>les microcontrôleurs (puissants)</a:t>
+              <a:t>VERILOG</a:t>
             </a:r>
           </a:p>
         </p:txBody>
@@ -5540,7 +6416,7 @@
     </p:spTree>
     <p:extLst>
       <p:ext uri="{BB962C8B-B14F-4D97-AF65-F5344CB8AC3E}">
-        <p14:creationId xmlns:p14="http://schemas.microsoft.com/office/powerpoint/2010/main" val="3861738587"/>
+        <p14:creationId xmlns:p14="http://schemas.microsoft.com/office/powerpoint/2010/main" val="3766863925"/>
       </p:ext>
     </p:extLst>
   </p:cSld>
@@ -5572,7 +6448,7 @@
           <p:cNvPr id="2" name="Titre 1">
             <a:extLst>
               <a:ext uri="{FF2B5EF4-FFF2-40B4-BE49-F238E27FC236}">
-                <a16:creationId xmlns:a16="http://schemas.microsoft.com/office/drawing/2014/main" id="{B6C8B12F-843D-C1AB-E165-7B02377F013A}"/>
+                <a16:creationId xmlns:a16="http://schemas.microsoft.com/office/drawing/2014/main" id="{2418C554-7DF5-BA42-C124-96B2153ED22F}"/>
               </a:ext>
             </a:extLst>
           </p:cNvPr>
@@ -5589,9 +6465,10 @@
           <a:lstStyle/>
           <a:p>
             <a:r>
-              <a:rPr lang="fr-FR" dirty="0"/>
-              <a:t>Microcontrôleurs</a:t>
-            </a:r>
+              <a:rPr lang="fr-FR" dirty="0" err="1"/>
+              <a:t>Interêt</a:t>
+            </a:r>
+            <a:endParaRPr lang="fr-FR" dirty="0"/>
           </a:p>
         </p:txBody>
       </p:sp>
@@ -5600,7 +6477,7 @@
           <p:cNvPr id="3" name="Espace réservé du contenu 2">
             <a:extLst>
               <a:ext uri="{FF2B5EF4-FFF2-40B4-BE49-F238E27FC236}">
-                <a16:creationId xmlns:a16="http://schemas.microsoft.com/office/drawing/2014/main" id="{452075CC-1761-121A-6B27-DBBADD799656}"/>
+                <a16:creationId xmlns:a16="http://schemas.microsoft.com/office/drawing/2014/main" id="{916C560F-42B9-9967-616D-D5A3C811DAF4}"/>
               </a:ext>
             </a:extLst>
           </p:cNvPr>
@@ -5617,26 +6494,34 @@
           <a:lstStyle/>
           <a:p>
             <a:r>
-              <a:rPr lang="fr-FR" dirty="0" err="1"/>
-              <a:t>ExecuTorch</a:t>
-            </a:r>
-            <a:r>
-              <a:rPr lang="fr-FR" dirty="0"/>
-              <a:t> est conçu pour exécuter du ML sur des microcontrôleurs ne disposant que de quelques Mo de mémoire</a:t>
-            </a:r>
-          </a:p>
-          <a:p>
-            <a:r>
-              <a:rPr lang="fr-FR" dirty="0"/>
-              <a:t>Aucune compatibilité avec le système d'exploitation n'est nécessaire</a:t>
-            </a:r>
+              <a:rPr lang="fr-FR" dirty="0"/>
+              <a:t>Le principal intérêt par rapport aux GPU NPU est que le FPGA n'implémente que le réseau dont il a besoin</a:t>
+            </a:r>
+          </a:p>
+          <a:p>
+            <a:pPr lvl="1"/>
+            <a:r>
+              <a:rPr lang="fr-FR" dirty="0"/>
+              <a:t>Bien plus économique en porte logique qu'un GPU</a:t>
+            </a:r>
+          </a:p>
+          <a:p>
+            <a:pPr lvl="1"/>
+            <a:r>
+              <a:rPr lang="fr-FR" dirty="0"/>
+              <a:t>Latence et consommation plus faible</a:t>
+            </a:r>
+          </a:p>
+          <a:p>
+            <a:pPr lvl="1"/>
+            <a:endParaRPr lang="fr-FR" dirty="0"/>
           </a:p>
         </p:txBody>
       </p:sp>
     </p:spTree>
     <p:extLst>
       <p:ext uri="{BB962C8B-B14F-4D97-AF65-F5344CB8AC3E}">
-        <p14:creationId xmlns:p14="http://schemas.microsoft.com/office/powerpoint/2010/main" val="1352314534"/>
+        <p14:creationId xmlns:p14="http://schemas.microsoft.com/office/powerpoint/2010/main" val="3617818474"/>
       </p:ext>
     </p:extLst>
   </p:cSld>
@@ -5668,7 +6553,7 @@
           <p:cNvPr id="2" name="Titre 1">
             <a:extLst>
               <a:ext uri="{FF2B5EF4-FFF2-40B4-BE49-F238E27FC236}">
-                <a16:creationId xmlns:a16="http://schemas.microsoft.com/office/drawing/2014/main" id="{513E62BB-1AA3-699C-12A5-D875DC0035E4}"/>
+                <a16:creationId xmlns:a16="http://schemas.microsoft.com/office/drawing/2014/main" id="{0E18F9F4-3047-9656-A245-C9696A3CE1AE}"/>
               </a:ext>
             </a:extLst>
           </p:cNvPr>
@@ -5696,7 +6581,7 @@
           <p:cNvPr id="3" name="Espace réservé du contenu 2">
             <a:extLst>
               <a:ext uri="{FF2B5EF4-FFF2-40B4-BE49-F238E27FC236}">
-                <a16:creationId xmlns:a16="http://schemas.microsoft.com/office/drawing/2014/main" id="{EB363C27-D278-6DB1-0599-EB0159BED738}"/>
+                <a16:creationId xmlns:a16="http://schemas.microsoft.com/office/drawing/2014/main" id="{85B4F3D4-DA23-B20D-8D5D-BDD042945DF5}"/>
               </a:ext>
             </a:extLst>
           </p:cNvPr>
@@ -5714,42 +6599,21 @@
           <a:p>
             <a:r>
               <a:rPr lang="fr-FR" dirty="0"/>
-              <a:t>Compatibilité avec de nombreux langages</a:t>
+              <a:t>Il existe plusieurs techniques et langages</a:t>
             </a:r>
           </a:p>
           <a:p>
             <a:pPr lvl="1"/>
             <a:r>
               <a:rPr lang="fr-FR" dirty="0"/>
-              <a:t>Java</a:t>
+              <a:t>HLS</a:t>
             </a:r>
           </a:p>
           <a:p>
             <a:pPr lvl="1"/>
             <a:r>
               <a:rPr lang="fr-FR" dirty="0"/>
-              <a:t>Swift</a:t>
-            </a:r>
-          </a:p>
-          <a:p>
-            <a:pPr lvl="1"/>
-            <a:r>
-              <a:rPr lang="fr-FR" dirty="0"/>
-              <a:t>Objective-C</a:t>
-            </a:r>
-          </a:p>
-          <a:p>
-            <a:pPr lvl="1"/>
-            <a:r>
-              <a:rPr lang="fr-FR" dirty="0"/>
-              <a:t>C++ : librairie embarqué TFML</a:t>
-            </a:r>
-          </a:p>
-          <a:p>
-            <a:pPr lvl="1"/>
-            <a:r>
-              <a:rPr lang="fr-FR" dirty="0"/>
-              <a:t>Python</a:t>
+              <a:t>VHDL</a:t>
             </a:r>
           </a:p>
         </p:txBody>
@@ -5757,7 +6621,7 @@
     </p:spTree>
     <p:extLst>
       <p:ext uri="{BB962C8B-B14F-4D97-AF65-F5344CB8AC3E}">
-        <p14:creationId xmlns:p14="http://schemas.microsoft.com/office/powerpoint/2010/main" val="413611580"/>
+        <p14:creationId xmlns:p14="http://schemas.microsoft.com/office/powerpoint/2010/main" val="58146672"/>
       </p:ext>
     </p:extLst>
   </p:cSld>
@@ -5789,7 +6653,7 @@
           <p:cNvPr id="2" name="Titre 1">
             <a:extLst>
               <a:ext uri="{FF2B5EF4-FFF2-40B4-BE49-F238E27FC236}">
-                <a16:creationId xmlns:a16="http://schemas.microsoft.com/office/drawing/2014/main" id="{ECBA6520-6CC8-5525-83C1-69D883917C99}"/>
+                <a16:creationId xmlns:a16="http://schemas.microsoft.com/office/drawing/2014/main" id="{C1461763-5A01-9F44-95CF-AC00C86B8498}"/>
               </a:ext>
             </a:extLst>
           </p:cNvPr>
@@ -5807,7 +6671,7 @@
           <a:p>
             <a:r>
               <a:rPr lang="fr-FR" dirty="0"/>
-              <a:t>Plateformes compatibles</a:t>
+              <a:t>HLS</a:t>
             </a:r>
           </a:p>
         </p:txBody>
@@ -5817,7 +6681,7 @@
           <p:cNvPr id="3" name="Espace réservé du contenu 2">
             <a:extLst>
               <a:ext uri="{FF2B5EF4-FFF2-40B4-BE49-F238E27FC236}">
-                <a16:creationId xmlns:a16="http://schemas.microsoft.com/office/drawing/2014/main" id="{73C49F64-BC9F-30D1-74B6-102E7AAAB5F8}"/>
+                <a16:creationId xmlns:a16="http://schemas.microsoft.com/office/drawing/2014/main" id="{FA281BCF-072E-33C0-C016-B89F14FB3D41}"/>
               </a:ext>
             </a:extLst>
           </p:cNvPr>
@@ -5835,7 +6699,30 @@
           <a:p>
             <a:r>
               <a:rPr lang="fr-FR" dirty="0"/>
-              <a:t>C++ 32 bits</a:t>
+              <a:t>High-</a:t>
+            </a:r>
+            <a:r>
+              <a:rPr lang="fr-FR" dirty="0" err="1"/>
+              <a:t>level</a:t>
+            </a:r>
+            <a:r>
+              <a:rPr lang="fr-FR" dirty="0"/>
+              <a:t> </a:t>
+            </a:r>
+            <a:r>
+              <a:rPr lang="fr-FR" dirty="0" err="1"/>
+              <a:t>synthesis</a:t>
+            </a:r>
+            <a:r>
+              <a:rPr lang="fr-FR" dirty="0"/>
+              <a:t> est un processus de conception automatisé qui prend une spécification comportementale abstraite d’un système numérique et en déduit une structure au niveau registre-transfert (RTL) réalisant le comportement donné</a:t>
+            </a:r>
+          </a:p>
+          <a:p>
+            <a:pPr lvl="1"/>
+            <a:r>
+              <a:rPr lang="fr-FR" dirty="0"/>
+              <a:t>L’objectif est de permettre aux concepteurs matériels de concevoir et de vérifier plus efficacement du matériel, en leur offrant un meilleur contrôle sur l’optimisation de l’architecture de leur conception, et en leur permettant de décrire le système à un niveau d’abstraction plus élevé pendant que l’outil se charge de l’implémentation RTL</a:t>
             </a:r>
           </a:p>
           <a:p>
@@ -5843,40 +6730,10 @@
           </a:p>
         </p:txBody>
       </p:sp>
-      <p:pic>
-        <p:nvPicPr>
-          <p:cNvPr id="8" name="Image 7">
-            <a:extLst>
-              <a:ext uri="{FF2B5EF4-FFF2-40B4-BE49-F238E27FC236}">
-                <a16:creationId xmlns:a16="http://schemas.microsoft.com/office/drawing/2014/main" id="{54CE9CF4-93BB-D619-26B7-1D7511B1786E}"/>
-              </a:ext>
-            </a:extLst>
-          </p:cNvPr>
-          <p:cNvPicPr>
-            <a:picLocks noChangeAspect="1"/>
-          </p:cNvPicPr>
-          <p:nvPr/>
-        </p:nvPicPr>
-        <p:blipFill>
-          <a:blip r:embed="rId2"/>
-          <a:stretch>
-            <a:fillRect/>
-          </a:stretch>
-        </p:blipFill>
-        <p:spPr>
-          <a:xfrm>
-            <a:off x="539552" y="1918120"/>
-            <a:ext cx="8676456" cy="4939880"/>
-          </a:xfrm>
-          <a:prstGeom prst="rect">
-            <a:avLst/>
-          </a:prstGeom>
-        </p:spPr>
-      </p:pic>
     </p:spTree>
     <p:extLst>
       <p:ext uri="{BB962C8B-B14F-4D97-AF65-F5344CB8AC3E}">
-        <p14:creationId xmlns:p14="http://schemas.microsoft.com/office/powerpoint/2010/main" val="3909169917"/>
+        <p14:creationId xmlns:p14="http://schemas.microsoft.com/office/powerpoint/2010/main" val="3169083135"/>
       </p:ext>
     </p:extLst>
   </p:cSld>
@@ -5908,7 +6765,7 @@
           <p:cNvPr id="2" name="Titre 1">
             <a:extLst>
               <a:ext uri="{FF2B5EF4-FFF2-40B4-BE49-F238E27FC236}">
-                <a16:creationId xmlns:a16="http://schemas.microsoft.com/office/drawing/2014/main" id="{274FCB78-4BFB-476D-A41F-FF53E17D9BF4}"/>
+                <a16:creationId xmlns:a16="http://schemas.microsoft.com/office/drawing/2014/main" id="{FB3D89F3-B314-AAB4-3369-4BCA03DE1E81}"/>
               </a:ext>
             </a:extLst>
           </p:cNvPr>
@@ -5926,7 +6783,7 @@
           <a:p>
             <a:r>
               <a:rPr lang="fr-FR" dirty="0"/>
-              <a:t>Limites</a:t>
+              <a:t>HLS</a:t>
             </a:r>
           </a:p>
         </p:txBody>
@@ -5936,7 +6793,7 @@
           <p:cNvPr id="3" name="Espace réservé du contenu 2">
             <a:extLst>
               <a:ext uri="{FF2B5EF4-FFF2-40B4-BE49-F238E27FC236}">
-                <a16:creationId xmlns:a16="http://schemas.microsoft.com/office/drawing/2014/main" id="{2DEF7473-7C72-1FD4-741D-17FDD458DB93}"/>
+                <a16:creationId xmlns:a16="http://schemas.microsoft.com/office/drawing/2014/main" id="{93AA45BE-9755-AD69-8913-29D5C85C664F}"/>
               </a:ext>
             </a:extLst>
           </p:cNvPr>
@@ -5954,42 +6811,13 @@
           <a:p>
             <a:r>
               <a:rPr lang="fr-FR" dirty="0"/>
-              <a:t>Compatibilité avec un sous-ensemble limité d'opérations </a:t>
-            </a:r>
-            <a:r>
-              <a:rPr lang="fr-FR" dirty="0" err="1"/>
-              <a:t>PyTorch</a:t>
-            </a:r>
-            <a:endParaRPr lang="fr-FR" dirty="0"/>
-          </a:p>
-          <a:p>
-            <a:r>
-              <a:rPr lang="fr-FR" dirty="0"/>
-              <a:t>Compatibilité avec un nombre limité d'appareils</a:t>
-            </a:r>
-          </a:p>
-          <a:p>
-            <a:r>
-              <a:rPr lang="fr-FR" dirty="0"/>
-              <a:t>API C++ de bas niveau nécessitant une gestion manuelle de la mémoire</a:t>
-            </a:r>
-          </a:p>
-          <a:p>
-            <a:pPr lvl="1"/>
-            <a:r>
-              <a:rPr lang="fr-FR" dirty="0"/>
-              <a:t>Pas de </a:t>
-            </a:r>
-            <a:r>
-              <a:rPr lang="fr-FR" dirty="0" err="1"/>
-              <a:t>MicroPython</a:t>
-            </a:r>
-            <a:endParaRPr lang="fr-FR" dirty="0"/>
-          </a:p>
-          <a:p>
-            <a:r>
-              <a:rPr lang="fr-FR" dirty="0"/>
-              <a:t>L'entraînement sur l'appareil n'est pas disponible</a:t>
+              <a:t>La synthèse commence par une spécification de haut niveau du problème</a:t>
+            </a:r>
+          </a:p>
+          <a:p>
+            <a:r>
+              <a:rPr lang="fr-FR" dirty="0"/>
+              <a:t>Le code est analysé, contraint architecturalement et planifié pour être transformé depuis un modèle au niveau transactionnel (TLM) vers une conception au niveau registre-transfert (RTL) dans un langage de description matériel (HDL), qui est ensuite généralement synthétisé au niveau portes via un outil de synthèse logique.</a:t>
             </a:r>
           </a:p>
         </p:txBody>
@@ -5997,7 +6825,7 @@
     </p:spTree>
     <p:extLst>
       <p:ext uri="{BB962C8B-B14F-4D97-AF65-F5344CB8AC3E}">
-        <p14:creationId xmlns:p14="http://schemas.microsoft.com/office/powerpoint/2010/main" val="3813616024"/>
+        <p14:creationId xmlns:p14="http://schemas.microsoft.com/office/powerpoint/2010/main" val="1260671309"/>
       </p:ext>
     </p:extLst>
   </p:cSld>

--- a/ppt/IoTAI31-FPGA.pptx
+++ b/ppt/IoTAI31-FPGA.pptx
@@ -5,10 +5,10 @@
     <p:sldMasterId id="2147483653" r:id="rId1"/>
   </p:sldMasterIdLst>
   <p:notesMasterIdLst>
-    <p:notesMasterId r:id="rId26"/>
+    <p:notesMasterId r:id="rId23"/>
   </p:notesMasterIdLst>
   <p:handoutMasterIdLst>
-    <p:handoutMasterId r:id="rId27"/>
+    <p:handoutMasterId r:id="rId24"/>
   </p:handoutMasterIdLst>
   <p:sldIdLst>
     <p:sldId id="264" r:id="rId2"/>
@@ -29,12 +29,9 @@
     <p:sldId id="280" r:id="rId17"/>
     <p:sldId id="282" r:id="rId18"/>
     <p:sldId id="272" r:id="rId19"/>
-    <p:sldId id="286" r:id="rId20"/>
-    <p:sldId id="287" r:id="rId21"/>
-    <p:sldId id="265" r:id="rId22"/>
-    <p:sldId id="266" r:id="rId23"/>
-    <p:sldId id="267" r:id="rId24"/>
-    <p:sldId id="268" r:id="rId25"/>
+    <p:sldId id="287" r:id="rId20"/>
+    <p:sldId id="286" r:id="rId21"/>
+    <p:sldId id="288" r:id="rId22"/>
   </p:sldIdLst>
   <p:sldSz cx="9144000" cy="6858000" type="screen4x3"/>
   <p:notesSz cx="6648450" cy="9782175"/>
@@ -5104,6 +5101,241 @@
           <p:cNvPr id="2" name="Titre 1">
             <a:extLst>
               <a:ext uri="{FF2B5EF4-FFF2-40B4-BE49-F238E27FC236}">
+                <a16:creationId xmlns:a16="http://schemas.microsoft.com/office/drawing/2014/main" id="{5A712845-BBC0-3174-E7C7-DF622575A5D3}"/>
+              </a:ext>
+            </a:extLst>
+          </p:cNvPr>
+          <p:cNvSpPr>
+            <a:spLocks noGrp="1"/>
+          </p:cNvSpPr>
+          <p:nvPr>
+            <p:ph type="title"/>
+          </p:nvPr>
+        </p:nvSpPr>
+        <p:spPr/>
+        <p:txBody>
+          <a:bodyPr/>
+          <a:lstStyle/>
+          <a:p>
+            <a:r>
+              <a:rPr lang="fr-FR" dirty="0"/>
+              <a:t>AMD Quark</a:t>
+            </a:r>
+          </a:p>
+        </p:txBody>
+      </p:sp>
+      <p:sp>
+        <p:nvSpPr>
+          <p:cNvPr id="3" name="Espace réservé du contenu 2">
+            <a:extLst>
+              <a:ext uri="{FF2B5EF4-FFF2-40B4-BE49-F238E27FC236}">
+                <a16:creationId xmlns:a16="http://schemas.microsoft.com/office/drawing/2014/main" id="{482E94C2-0FCA-33B7-DC3B-DCB6038C466E}"/>
+              </a:ext>
+            </a:extLst>
+          </p:cNvPr>
+          <p:cNvSpPr>
+            <a:spLocks noGrp="1"/>
+          </p:cNvSpPr>
+          <p:nvPr>
+            <p:ph idx="1"/>
+          </p:nvPr>
+        </p:nvSpPr>
+        <p:spPr/>
+        <p:txBody>
+          <a:bodyPr/>
+          <a:lstStyle/>
+          <a:p>
+            <a:r>
+              <a:rPr lang="fr-FR" dirty="0"/>
+              <a:t>AMD Quark est un toolkit complet multi‑plateforme conçu pour simplifier et améliorer la quantification des modèles de DL</a:t>
+            </a:r>
+          </a:p>
+          <a:p>
+            <a:pPr lvl="1"/>
+            <a:r>
+              <a:rPr lang="fr-FR" dirty="0"/>
+              <a:t>Compatible </a:t>
+            </a:r>
+            <a:r>
+              <a:rPr lang="fr-FR" dirty="0" err="1"/>
+              <a:t>PyTorch</a:t>
+            </a:r>
+            <a:r>
+              <a:rPr lang="fr-FR" dirty="0"/>
+              <a:t> et ONNX, Quark permet aux développeurs d’optimiser leurs modèles pour un déploiement sur un large éventail de cibles matérielles</a:t>
+            </a:r>
+          </a:p>
+        </p:txBody>
+      </p:sp>
+      <p:pic>
+        <p:nvPicPr>
+          <p:cNvPr id="5" name="Image 4" descr="image">
+            <a:extLst>
+              <a:ext uri="{FF2B5EF4-FFF2-40B4-BE49-F238E27FC236}">
+                <a16:creationId xmlns:a16="http://schemas.microsoft.com/office/drawing/2014/main" id="{8B08710F-ECB3-C63C-9F55-402AA43C5C7D}"/>
+              </a:ext>
+            </a:extLst>
+          </p:cNvPr>
+          <p:cNvPicPr>
+            <a:picLocks noChangeAspect="1"/>
+          </p:cNvPicPr>
+          <p:nvPr/>
+        </p:nvPicPr>
+        <p:blipFill>
+          <a:blip r:embed="rId2"/>
+          <a:stretch>
+            <a:fillRect/>
+          </a:stretch>
+        </p:blipFill>
+        <p:spPr>
+          <a:xfrm>
+            <a:off x="1331640" y="4332104"/>
+            <a:ext cx="6865373" cy="2512687"/>
+          </a:xfrm>
+          <a:prstGeom prst="rect">
+            <a:avLst/>
+          </a:prstGeom>
+        </p:spPr>
+      </p:pic>
+    </p:spTree>
+    <p:extLst>
+      <p:ext uri="{BB962C8B-B14F-4D97-AF65-F5344CB8AC3E}">
+        <p14:creationId xmlns:p14="http://schemas.microsoft.com/office/powerpoint/2010/main" val="3783609057"/>
+      </p:ext>
+    </p:extLst>
+  </p:cSld>
+  <p:clrMapOvr>
+    <a:masterClrMapping/>
+  </p:clrMapOvr>
+</p:sld>
+</file>
+
+<file path=ppt/slides/slide2.xml><?xml version="1.0" encoding="utf-8"?>
+<p:sld xmlns:a="http://schemas.openxmlformats.org/drawingml/2006/main" xmlns:r="http://schemas.openxmlformats.org/officeDocument/2006/relationships" xmlns:p="http://schemas.openxmlformats.org/presentationml/2006/main">
+  <p:cSld>
+    <p:spTree>
+      <p:nvGrpSpPr>
+        <p:cNvPr id="1" name=""/>
+        <p:cNvGrpSpPr/>
+        <p:nvPr/>
+      </p:nvGrpSpPr>
+      <p:grpSpPr>
+        <a:xfrm>
+          <a:off x="0" y="0"/>
+          <a:ext cx="0" cy="0"/>
+          <a:chOff x="0" y="0"/>
+          <a:chExt cx="0" cy="0"/>
+        </a:xfrm>
+      </p:grpSpPr>
+      <p:sp>
+        <p:nvSpPr>
+          <p:cNvPr id="2" name="Titre 1">
+            <a:extLst>
+              <a:ext uri="{FF2B5EF4-FFF2-40B4-BE49-F238E27FC236}">
+                <a16:creationId xmlns:a16="http://schemas.microsoft.com/office/drawing/2014/main" id="{98E90674-A30F-2BBF-823C-4AB24813DD31}"/>
+              </a:ext>
+            </a:extLst>
+          </p:cNvPr>
+          <p:cNvSpPr>
+            <a:spLocks noGrp="1"/>
+          </p:cNvSpPr>
+          <p:nvPr>
+            <p:ph type="title"/>
+          </p:nvPr>
+        </p:nvSpPr>
+        <p:spPr/>
+        <p:txBody>
+          <a:bodyPr/>
+          <a:lstStyle/>
+          <a:p>
+            <a:r>
+              <a:rPr lang="fr-FR" dirty="0"/>
+              <a:t>Pourquoi ?</a:t>
+            </a:r>
+          </a:p>
+        </p:txBody>
+      </p:sp>
+      <p:sp>
+        <p:nvSpPr>
+          <p:cNvPr id="3" name="Espace réservé du contenu 2">
+            <a:extLst>
+              <a:ext uri="{FF2B5EF4-FFF2-40B4-BE49-F238E27FC236}">
+                <a16:creationId xmlns:a16="http://schemas.microsoft.com/office/drawing/2014/main" id="{12F2A1DC-52BD-A3B3-A109-54EF4BB4B54F}"/>
+              </a:ext>
+            </a:extLst>
+          </p:cNvPr>
+          <p:cNvSpPr>
+            <a:spLocks noGrp="1"/>
+          </p:cNvSpPr>
+          <p:nvPr>
+            <p:ph idx="1"/>
+          </p:nvPr>
+        </p:nvSpPr>
+        <p:spPr/>
+        <p:txBody>
+          <a:bodyPr/>
+          <a:lstStyle/>
+          <a:p>
+            <a:r>
+              <a:rPr lang="fr-FR" dirty="0"/>
+              <a:t>Les réseaux de neurones et les Random Forest sont des modèles connexionnistes</a:t>
+            </a:r>
+          </a:p>
+          <a:p>
+            <a:pPr lvl="1"/>
+            <a:r>
+              <a:rPr lang="fr-FR" dirty="0"/>
+              <a:t>De simples graphes ou arbres</a:t>
+            </a:r>
+          </a:p>
+          <a:p>
+            <a:pPr lvl="1"/>
+            <a:r>
+              <a:rPr lang="fr-FR" dirty="0"/>
+              <a:t>Il semble facile de les convertir en schéma logique puis physique</a:t>
+            </a:r>
+          </a:p>
+          <a:p>
+            <a:pPr lvl="1"/>
+            <a:endParaRPr lang="fr-FR" dirty="0"/>
+          </a:p>
+        </p:txBody>
+      </p:sp>
+    </p:spTree>
+    <p:extLst>
+      <p:ext uri="{BB962C8B-B14F-4D97-AF65-F5344CB8AC3E}">
+        <p14:creationId xmlns:p14="http://schemas.microsoft.com/office/powerpoint/2010/main" val="4029350153"/>
+      </p:ext>
+    </p:extLst>
+  </p:cSld>
+  <p:clrMapOvr>
+    <a:masterClrMapping/>
+  </p:clrMapOvr>
+</p:sld>
+</file>
+
+<file path=ppt/slides/slide20.xml><?xml version="1.0" encoding="utf-8"?>
+<p:sld xmlns:a="http://schemas.openxmlformats.org/drawingml/2006/main" xmlns:r="http://schemas.openxmlformats.org/officeDocument/2006/relationships" xmlns:p="http://schemas.openxmlformats.org/presentationml/2006/main">
+  <p:cSld>
+    <p:spTree>
+      <p:nvGrpSpPr>
+        <p:cNvPr id="1" name=""/>
+        <p:cNvGrpSpPr/>
+        <p:nvPr/>
+      </p:nvGrpSpPr>
+      <p:grpSpPr>
+        <a:xfrm>
+          <a:off x="0" y="0"/>
+          <a:ext cx="0" cy="0"/>
+          <a:chOff x="0" y="0"/>
+          <a:chExt cx="0" cy="0"/>
+        </a:xfrm>
+      </p:grpSpPr>
+      <p:sp>
+        <p:nvSpPr>
+          <p:cNvPr id="2" name="Titre 1">
+            <a:extLst>
+              <a:ext uri="{FF2B5EF4-FFF2-40B4-BE49-F238E27FC236}">
                 <a16:creationId xmlns:a16="http://schemas.microsoft.com/office/drawing/2014/main" id="{506A0BD7-841B-A922-8210-66CE6F3B44C8}"/>
               </a:ext>
             </a:extLst>
@@ -5198,210 +5430,6 @@
 </p:sld>
 </file>
 
-<file path=ppt/slides/slide2.xml><?xml version="1.0" encoding="utf-8"?>
-<p:sld xmlns:a="http://schemas.openxmlformats.org/drawingml/2006/main" xmlns:r="http://schemas.openxmlformats.org/officeDocument/2006/relationships" xmlns:p="http://schemas.openxmlformats.org/presentationml/2006/main">
-  <p:cSld>
-    <p:spTree>
-      <p:nvGrpSpPr>
-        <p:cNvPr id="1" name=""/>
-        <p:cNvGrpSpPr/>
-        <p:nvPr/>
-      </p:nvGrpSpPr>
-      <p:grpSpPr>
-        <a:xfrm>
-          <a:off x="0" y="0"/>
-          <a:ext cx="0" cy="0"/>
-          <a:chOff x="0" y="0"/>
-          <a:chExt cx="0" cy="0"/>
-        </a:xfrm>
-      </p:grpSpPr>
-      <p:sp>
-        <p:nvSpPr>
-          <p:cNvPr id="2" name="Titre 1">
-            <a:extLst>
-              <a:ext uri="{FF2B5EF4-FFF2-40B4-BE49-F238E27FC236}">
-                <a16:creationId xmlns:a16="http://schemas.microsoft.com/office/drawing/2014/main" id="{98E90674-A30F-2BBF-823C-4AB24813DD31}"/>
-              </a:ext>
-            </a:extLst>
-          </p:cNvPr>
-          <p:cNvSpPr>
-            <a:spLocks noGrp="1"/>
-          </p:cNvSpPr>
-          <p:nvPr>
-            <p:ph type="title"/>
-          </p:nvPr>
-        </p:nvSpPr>
-        <p:spPr/>
-        <p:txBody>
-          <a:bodyPr/>
-          <a:lstStyle/>
-          <a:p>
-            <a:r>
-              <a:rPr lang="fr-FR" dirty="0"/>
-              <a:t>Pourquoi ?</a:t>
-            </a:r>
-          </a:p>
-        </p:txBody>
-      </p:sp>
-      <p:sp>
-        <p:nvSpPr>
-          <p:cNvPr id="3" name="Espace réservé du contenu 2">
-            <a:extLst>
-              <a:ext uri="{FF2B5EF4-FFF2-40B4-BE49-F238E27FC236}">
-                <a16:creationId xmlns:a16="http://schemas.microsoft.com/office/drawing/2014/main" id="{12F2A1DC-52BD-A3B3-A109-54EF4BB4B54F}"/>
-              </a:ext>
-            </a:extLst>
-          </p:cNvPr>
-          <p:cNvSpPr>
-            <a:spLocks noGrp="1"/>
-          </p:cNvSpPr>
-          <p:nvPr>
-            <p:ph idx="1"/>
-          </p:nvPr>
-        </p:nvSpPr>
-        <p:spPr/>
-        <p:txBody>
-          <a:bodyPr/>
-          <a:lstStyle/>
-          <a:p>
-            <a:r>
-              <a:rPr lang="fr-FR" dirty="0"/>
-              <a:t>Les réseaux de neurones et les Random Forest sont des modèles connexionnistes</a:t>
-            </a:r>
-          </a:p>
-          <a:p>
-            <a:pPr lvl="1"/>
-            <a:r>
-              <a:rPr lang="fr-FR" dirty="0"/>
-              <a:t>De simples graphes ou arbres</a:t>
-            </a:r>
-          </a:p>
-          <a:p>
-            <a:pPr lvl="1"/>
-            <a:r>
-              <a:rPr lang="fr-FR" dirty="0"/>
-              <a:t>Il semble facile de les convertir en schéma logique puis physique</a:t>
-            </a:r>
-          </a:p>
-          <a:p>
-            <a:pPr lvl="1"/>
-            <a:endParaRPr lang="fr-FR" dirty="0"/>
-          </a:p>
-        </p:txBody>
-      </p:sp>
-    </p:spTree>
-    <p:extLst>
-      <p:ext uri="{BB962C8B-B14F-4D97-AF65-F5344CB8AC3E}">
-        <p14:creationId xmlns:p14="http://schemas.microsoft.com/office/powerpoint/2010/main" val="4029350153"/>
-      </p:ext>
-    </p:extLst>
-  </p:cSld>
-  <p:clrMapOvr>
-    <a:masterClrMapping/>
-  </p:clrMapOvr>
-</p:sld>
-</file>
-
-<file path=ppt/slides/slide20.xml><?xml version="1.0" encoding="utf-8"?>
-<p:sld xmlns:a="http://schemas.openxmlformats.org/drawingml/2006/main" xmlns:r="http://schemas.openxmlformats.org/officeDocument/2006/relationships" xmlns:p="http://schemas.openxmlformats.org/presentationml/2006/main">
-  <p:cSld>
-    <p:spTree>
-      <p:nvGrpSpPr>
-        <p:cNvPr id="1" name=""/>
-        <p:cNvGrpSpPr/>
-        <p:nvPr/>
-      </p:nvGrpSpPr>
-      <p:grpSpPr>
-        <a:xfrm>
-          <a:off x="0" y="0"/>
-          <a:ext cx="0" cy="0"/>
-          <a:chOff x="0" y="0"/>
-          <a:chExt cx="0" cy="0"/>
-        </a:xfrm>
-      </p:grpSpPr>
-      <p:sp>
-        <p:nvSpPr>
-          <p:cNvPr id="2" name="Titre 1">
-            <a:extLst>
-              <a:ext uri="{FF2B5EF4-FFF2-40B4-BE49-F238E27FC236}">
-                <a16:creationId xmlns:a16="http://schemas.microsoft.com/office/drawing/2014/main" id="{5A712845-BBC0-3174-E7C7-DF622575A5D3}"/>
-              </a:ext>
-            </a:extLst>
-          </p:cNvPr>
-          <p:cNvSpPr>
-            <a:spLocks noGrp="1"/>
-          </p:cNvSpPr>
-          <p:nvPr>
-            <p:ph type="title"/>
-          </p:nvPr>
-        </p:nvSpPr>
-        <p:spPr/>
-        <p:txBody>
-          <a:bodyPr/>
-          <a:lstStyle/>
-          <a:p>
-            <a:r>
-              <a:rPr lang="fr-FR" dirty="0"/>
-              <a:t>AMD Quark</a:t>
-            </a:r>
-          </a:p>
-        </p:txBody>
-      </p:sp>
-      <p:sp>
-        <p:nvSpPr>
-          <p:cNvPr id="3" name="Espace réservé du contenu 2">
-            <a:extLst>
-              <a:ext uri="{FF2B5EF4-FFF2-40B4-BE49-F238E27FC236}">
-                <a16:creationId xmlns:a16="http://schemas.microsoft.com/office/drawing/2014/main" id="{482E94C2-0FCA-33B7-DC3B-DCB6038C466E}"/>
-              </a:ext>
-            </a:extLst>
-          </p:cNvPr>
-          <p:cNvSpPr>
-            <a:spLocks noGrp="1"/>
-          </p:cNvSpPr>
-          <p:nvPr>
-            <p:ph idx="1"/>
-          </p:nvPr>
-        </p:nvSpPr>
-        <p:spPr/>
-        <p:txBody>
-          <a:bodyPr/>
-          <a:lstStyle/>
-          <a:p>
-            <a:r>
-              <a:rPr lang="fr-FR" dirty="0"/>
-              <a:t>AMD Quark est un toolkit complet multi‑plateforme conçu pour simplifier et améliorer la quantification des modèles de DL</a:t>
-            </a:r>
-          </a:p>
-          <a:p>
-            <a:r>
-              <a:rPr lang="fr-FR" dirty="0"/>
-              <a:t>Prenant en charge à la fois les modèles </a:t>
-            </a:r>
-            <a:r>
-              <a:rPr lang="fr-FR" dirty="0" err="1"/>
-              <a:t>PyTorch</a:t>
-            </a:r>
-            <a:r>
-              <a:rPr lang="fr-FR" dirty="0"/>
-              <a:t> et ONNX, AMD Quark permet aux développeurs d’optimiser leurs modèles pour un déploiement sur un large éventail de cibles matérielles, en obtenant des gains de performance significatifs sans compromettre la précision</a:t>
-            </a:r>
-          </a:p>
-        </p:txBody>
-      </p:sp>
-    </p:spTree>
-    <p:extLst>
-      <p:ext uri="{BB962C8B-B14F-4D97-AF65-F5344CB8AC3E}">
-        <p14:creationId xmlns:p14="http://schemas.microsoft.com/office/powerpoint/2010/main" val="3783609057"/>
-      </p:ext>
-    </p:extLst>
-  </p:cSld>
-  <p:clrMapOvr>
-    <a:masterClrMapping/>
-  </p:clrMapOvr>
-</p:sld>
-</file>
-
 <file path=ppt/slides/slide21.xml><?xml version="1.0" encoding="utf-8"?>
 <p:sld xmlns:a="http://schemas.openxmlformats.org/drawingml/2006/main" xmlns:r="http://schemas.openxmlformats.org/officeDocument/2006/relationships" xmlns:p="http://schemas.openxmlformats.org/presentationml/2006/main">
   <p:cSld>
@@ -5424,7 +5452,7 @@
           <p:cNvPr id="2" name="Titre 1">
             <a:extLst>
               <a:ext uri="{FF2B5EF4-FFF2-40B4-BE49-F238E27FC236}">
-                <a16:creationId xmlns:a16="http://schemas.microsoft.com/office/drawing/2014/main" id="{787AA94C-25BA-AC27-A44C-F3EE163ABFA0}"/>
+                <a16:creationId xmlns:a16="http://schemas.microsoft.com/office/drawing/2014/main" id="{E1420196-E432-FCD1-4943-41FFF074CFD2}"/>
               </a:ext>
             </a:extLst>
           </p:cNvPr>
@@ -5440,7 +5468,10 @@
           <a:bodyPr/>
           <a:lstStyle/>
           <a:p>
-            <a:endParaRPr lang="fr-FR"/>
+            <a:r>
+              <a:rPr lang="fr-FR" dirty="0"/>
+              <a:t>TP 32</a:t>
+            </a:r>
           </a:p>
         </p:txBody>
       </p:sp>
@@ -5449,7 +5480,7 @@
           <p:cNvPr id="3" name="Espace réservé du contenu 2">
             <a:extLst>
               <a:ext uri="{FF2B5EF4-FFF2-40B4-BE49-F238E27FC236}">
-                <a16:creationId xmlns:a16="http://schemas.microsoft.com/office/drawing/2014/main" id="{3BD6223A-8759-83E0-4A49-426B6123F674}"/>
+                <a16:creationId xmlns:a16="http://schemas.microsoft.com/office/drawing/2014/main" id="{ABD264AD-5FA5-9220-6695-02B8F20F8F56}"/>
               </a:ext>
             </a:extLst>
           </p:cNvPr>
@@ -5466,594 +5497,16 @@
           <a:lstStyle/>
           <a:p>
             <a:r>
-              <a:rPr lang="fr-FR" b="1" dirty="0"/>
-              <a:t>Stack recommandée : Xilinx Vitis AI + Docker</a:t>
-            </a:r>
-          </a:p>
-          <a:p>
-            <a:r>
-              <a:rPr lang="fr-FR" dirty="0"/>
-              <a:t>.h5 / .</a:t>
-            </a:r>
-            <a:r>
-              <a:rPr lang="fr-FR" dirty="0" err="1"/>
-              <a:t>pth</a:t>
-            </a:r>
-            <a:endParaRPr lang="fr-FR" dirty="0"/>
-          </a:p>
-          <a:p>
-            <a:r>
-              <a:rPr lang="fr-FR" dirty="0"/>
-              <a:t>    → ONNX</a:t>
-            </a:r>
-          </a:p>
-          <a:p>
-            <a:r>
-              <a:rPr lang="fr-FR" dirty="0"/>
-              <a:t>        → Vitis AI </a:t>
-            </a:r>
-            <a:r>
-              <a:rPr lang="fr-FR" dirty="0" err="1"/>
-              <a:t>Quantizer</a:t>
-            </a:r>
-            <a:r>
-              <a:rPr lang="fr-FR" dirty="0"/>
-              <a:t> (INT8)</a:t>
-            </a:r>
-          </a:p>
-          <a:p>
-            <a:r>
-              <a:rPr lang="fr-FR" dirty="0"/>
-              <a:t>            → Vitis AI Compiler</a:t>
-            </a:r>
-          </a:p>
-          <a:p>
-            <a:r>
-              <a:rPr lang="fr-FR" dirty="0"/>
-              <a:t>                → Simulation sur </a:t>
-            </a:r>
-            <a:r>
-              <a:rPr lang="fr-FR" dirty="0" err="1"/>
-              <a:t>xmodel</a:t>
-            </a:r>
-            <a:endParaRPr lang="fr-FR" dirty="0"/>
-          </a:p>
-          <a:p>
-            <a:r>
-              <a:rPr lang="fr-FR" b="1" dirty="0"/>
-              <a:t>Installation sur Windows</a:t>
-            </a:r>
-          </a:p>
-          <a:p>
-            <a:endParaRPr lang="fr-FR" dirty="0"/>
+              <a:rPr lang="fr-FR"/>
+              <a:t>Vitis AI</a:t>
+            </a:r>
           </a:p>
         </p:txBody>
       </p:sp>
     </p:spTree>
     <p:extLst>
       <p:ext uri="{BB962C8B-B14F-4D97-AF65-F5344CB8AC3E}">
-        <p14:creationId xmlns:p14="http://schemas.microsoft.com/office/powerpoint/2010/main" val="3412424550"/>
-      </p:ext>
-    </p:extLst>
-  </p:cSld>
-  <p:clrMapOvr>
-    <a:masterClrMapping/>
-  </p:clrMapOvr>
-</p:sld>
-</file>
-
-<file path=ppt/slides/slide22.xml><?xml version="1.0" encoding="utf-8"?>
-<p:sld xmlns:a="http://schemas.openxmlformats.org/drawingml/2006/main" xmlns:r="http://schemas.openxmlformats.org/officeDocument/2006/relationships" xmlns:p="http://schemas.openxmlformats.org/presentationml/2006/main">
-  <p:cSld>
-    <p:spTree>
-      <p:nvGrpSpPr>
-        <p:cNvPr id="1" name=""/>
-        <p:cNvGrpSpPr/>
-        <p:nvPr/>
-      </p:nvGrpSpPr>
-      <p:grpSpPr>
-        <a:xfrm>
-          <a:off x="0" y="0"/>
-          <a:ext cx="0" cy="0"/>
-          <a:chOff x="0" y="0"/>
-          <a:chExt cx="0" cy="0"/>
-        </a:xfrm>
-      </p:grpSpPr>
-      <p:sp>
-        <p:nvSpPr>
-          <p:cNvPr id="2" name="Titre 1">
-            <a:extLst>
-              <a:ext uri="{FF2B5EF4-FFF2-40B4-BE49-F238E27FC236}">
-                <a16:creationId xmlns:a16="http://schemas.microsoft.com/office/drawing/2014/main" id="{A1BACD3C-F381-DE7D-418A-6256E25D3895}"/>
-              </a:ext>
-            </a:extLst>
-          </p:cNvPr>
-          <p:cNvSpPr>
-            <a:spLocks noGrp="1"/>
-          </p:cNvSpPr>
-          <p:nvPr>
-            <p:ph type="title"/>
-          </p:nvPr>
-        </p:nvSpPr>
-        <p:spPr/>
-        <p:txBody>
-          <a:bodyPr/>
-          <a:lstStyle/>
-          <a:p>
-            <a:endParaRPr lang="fr-FR"/>
-          </a:p>
-        </p:txBody>
-      </p:sp>
-      <p:sp>
-        <p:nvSpPr>
-          <p:cNvPr id="3" name="Espace réservé du contenu 2">
-            <a:extLst>
-              <a:ext uri="{FF2B5EF4-FFF2-40B4-BE49-F238E27FC236}">
-                <a16:creationId xmlns:a16="http://schemas.microsoft.com/office/drawing/2014/main" id="{69D145C8-41F3-9CDC-CB8E-3439EDD989A6}"/>
-              </a:ext>
-            </a:extLst>
-          </p:cNvPr>
-          <p:cNvSpPr>
-            <a:spLocks noGrp="1"/>
-          </p:cNvSpPr>
-          <p:nvPr>
-            <p:ph idx="1"/>
-          </p:nvPr>
-        </p:nvSpPr>
-        <p:spPr/>
-        <p:txBody>
-          <a:bodyPr/>
-          <a:lstStyle/>
-          <a:p>
-            <a:r>
-              <a:rPr lang="fr-FR" dirty="0"/>
-              <a:t># Installe Docker Desktop</a:t>
-            </a:r>
-          </a:p>
-          <a:p>
-            <a:r>
-              <a:rPr lang="fr-FR" dirty="0"/>
-              <a:t># Puis pull l'image Vitis AI</a:t>
-            </a:r>
-          </a:p>
-          <a:p>
-            <a:r>
-              <a:rPr lang="fr-FR" dirty="0"/>
-              <a:t>docker pull </a:t>
-            </a:r>
-            <a:r>
-              <a:rPr lang="fr-FR" dirty="0" err="1"/>
-              <a:t>xilinx</a:t>
-            </a:r>
-            <a:r>
-              <a:rPr lang="fr-FR" dirty="0"/>
-              <a:t>/</a:t>
-            </a:r>
-            <a:r>
-              <a:rPr lang="fr-FR" dirty="0" err="1"/>
-              <a:t>vitis-ai-cpu:latest</a:t>
-            </a:r>
-            <a:endParaRPr lang="fr-FR" dirty="0"/>
-          </a:p>
-          <a:p>
-            <a:r>
-              <a:rPr lang="fr-FR" dirty="0"/>
-              <a:t>docker run -</a:t>
-            </a:r>
-            <a:r>
-              <a:rPr lang="fr-FR" dirty="0" err="1"/>
-              <a:t>it</a:t>
-            </a:r>
-            <a:r>
-              <a:rPr lang="fr-FR" dirty="0"/>
-              <a:t> </a:t>
-            </a:r>
-            <a:r>
-              <a:rPr lang="fr-FR" dirty="0" err="1"/>
-              <a:t>xilinx</a:t>
-            </a:r>
-            <a:r>
-              <a:rPr lang="fr-FR" dirty="0"/>
-              <a:t>/</a:t>
-            </a:r>
-            <a:r>
-              <a:rPr lang="fr-FR" dirty="0" err="1"/>
-              <a:t>vitis-ai-cpu:latest</a:t>
-            </a:r>
-            <a:endParaRPr lang="fr-FR" dirty="0"/>
-          </a:p>
-        </p:txBody>
-      </p:sp>
-    </p:spTree>
-    <p:extLst>
-      <p:ext uri="{BB962C8B-B14F-4D97-AF65-F5344CB8AC3E}">
-        <p14:creationId xmlns:p14="http://schemas.microsoft.com/office/powerpoint/2010/main" val="568035009"/>
-      </p:ext>
-    </p:extLst>
-  </p:cSld>
-  <p:clrMapOvr>
-    <a:masterClrMapping/>
-  </p:clrMapOvr>
-</p:sld>
-</file>
-
-<file path=ppt/slides/slide23.xml><?xml version="1.0" encoding="utf-8"?>
-<p:sld xmlns:a="http://schemas.openxmlformats.org/drawingml/2006/main" xmlns:r="http://schemas.openxmlformats.org/officeDocument/2006/relationships" xmlns:p="http://schemas.openxmlformats.org/presentationml/2006/main">
-  <p:cSld>
-    <p:spTree>
-      <p:nvGrpSpPr>
-        <p:cNvPr id="1" name=""/>
-        <p:cNvGrpSpPr/>
-        <p:nvPr/>
-      </p:nvGrpSpPr>
-      <p:grpSpPr>
-        <a:xfrm>
-          <a:off x="0" y="0"/>
-          <a:ext cx="0" cy="0"/>
-          <a:chOff x="0" y="0"/>
-          <a:chExt cx="0" cy="0"/>
-        </a:xfrm>
-      </p:grpSpPr>
-      <p:sp>
-        <p:nvSpPr>
-          <p:cNvPr id="2" name="Titre 1">
-            <a:extLst>
-              <a:ext uri="{FF2B5EF4-FFF2-40B4-BE49-F238E27FC236}">
-                <a16:creationId xmlns:a16="http://schemas.microsoft.com/office/drawing/2014/main" id="{937DEE62-367C-3C73-947B-7C78AF0974EF}"/>
-              </a:ext>
-            </a:extLst>
-          </p:cNvPr>
-          <p:cNvSpPr>
-            <a:spLocks noGrp="1"/>
-          </p:cNvSpPr>
-          <p:nvPr>
-            <p:ph type="title"/>
-          </p:nvPr>
-        </p:nvSpPr>
-        <p:spPr/>
-        <p:txBody>
-          <a:bodyPr/>
-          <a:lstStyle/>
-          <a:p>
-            <a:endParaRPr lang="fr-FR"/>
-          </a:p>
-        </p:txBody>
-      </p:sp>
-      <p:sp>
-        <p:nvSpPr>
-          <p:cNvPr id="3" name="Espace réservé du contenu 2">
-            <a:extLst>
-              <a:ext uri="{FF2B5EF4-FFF2-40B4-BE49-F238E27FC236}">
-                <a16:creationId xmlns:a16="http://schemas.microsoft.com/office/drawing/2014/main" id="{D551B990-F0B7-71EE-48E3-C4141D648309}"/>
-              </a:ext>
-            </a:extLst>
-          </p:cNvPr>
-          <p:cNvSpPr>
-            <a:spLocks noGrp="1"/>
-          </p:cNvSpPr>
-          <p:nvPr>
-            <p:ph idx="1"/>
-          </p:nvPr>
-        </p:nvSpPr>
-        <p:spPr/>
-        <p:txBody>
-          <a:bodyPr/>
-          <a:lstStyle/>
-          <a:p>
-            <a:r>
-              <a:rPr lang="fr-FR" sz="2000" dirty="0"/>
-              <a:t># </a:t>
-            </a:r>
-            <a:r>
-              <a:rPr lang="fr-FR" sz="2000" dirty="0" err="1"/>
-              <a:t>Quantisation</a:t>
-            </a:r>
-            <a:r>
-              <a:rPr lang="fr-FR" sz="2000" dirty="0"/>
-              <a:t> INT8</a:t>
-            </a:r>
-          </a:p>
-          <a:p>
-            <a:r>
-              <a:rPr lang="fr-FR" sz="2000" dirty="0" err="1"/>
-              <a:t>vai_q_onnx</a:t>
-            </a:r>
-            <a:r>
-              <a:rPr lang="fr-FR" sz="2000" dirty="0"/>
-              <a:t> </a:t>
-            </a:r>
-            <a:r>
-              <a:rPr lang="fr-FR" sz="2000" dirty="0" err="1"/>
-              <a:t>quantize</a:t>
-            </a:r>
-            <a:r>
-              <a:rPr lang="fr-FR" sz="2000" dirty="0"/>
-              <a:t> \</a:t>
-            </a:r>
-          </a:p>
-          <a:p>
-            <a:r>
-              <a:rPr lang="fr-FR" sz="2000" dirty="0"/>
-              <a:t>  --</a:t>
-            </a:r>
-            <a:r>
-              <a:rPr lang="fr-FR" sz="2000" dirty="0" err="1"/>
-              <a:t>input_model</a:t>
-            </a:r>
-            <a:r>
-              <a:rPr lang="fr-FR" sz="2000" dirty="0"/>
-              <a:t> </a:t>
-            </a:r>
-            <a:r>
-              <a:rPr lang="fr-FR" sz="2000" dirty="0" err="1"/>
-              <a:t>wdbc.onnx</a:t>
-            </a:r>
-            <a:r>
-              <a:rPr lang="fr-FR" sz="2000" dirty="0"/>
-              <a:t> \</a:t>
-            </a:r>
-          </a:p>
-          <a:p>
-            <a:r>
-              <a:rPr lang="fr-FR" sz="2000" dirty="0"/>
-              <a:t>  --</a:t>
-            </a:r>
-            <a:r>
-              <a:rPr lang="fr-FR" sz="2000" dirty="0" err="1"/>
-              <a:t>output_model</a:t>
-            </a:r>
-            <a:r>
-              <a:rPr lang="fr-FR" sz="2000" dirty="0"/>
-              <a:t> </a:t>
-            </a:r>
-            <a:r>
-              <a:rPr lang="fr-FR" sz="2000" dirty="0" err="1"/>
-              <a:t>wdbc_quant.onnx</a:t>
-            </a:r>
-            <a:r>
-              <a:rPr lang="fr-FR" sz="2000" dirty="0"/>
-              <a:t> \</a:t>
-            </a:r>
-          </a:p>
-          <a:p>
-            <a:r>
-              <a:rPr lang="fr-FR" sz="2000" dirty="0"/>
-              <a:t>  --</a:t>
-            </a:r>
-            <a:r>
-              <a:rPr lang="fr-FR" sz="2000" dirty="0" err="1"/>
-              <a:t>calibration_data_reader</a:t>
-            </a:r>
-            <a:r>
-              <a:rPr lang="fr-FR" sz="2000" dirty="0"/>
-              <a:t> calibration.py</a:t>
-            </a:r>
-          </a:p>
-          <a:p>
-            <a:endParaRPr lang="fr-FR" sz="2000" dirty="0"/>
-          </a:p>
-          <a:p>
-            <a:r>
-              <a:rPr lang="fr-FR" sz="2000" dirty="0"/>
-              <a:t># Compilation pour DPU (le NPU des </a:t>
-            </a:r>
-            <a:r>
-              <a:rPr lang="fr-FR" sz="2000" dirty="0" err="1"/>
-              <a:t>Zynq</a:t>
-            </a:r>
-            <a:r>
-              <a:rPr lang="fr-FR" sz="2000" dirty="0"/>
-              <a:t>)</a:t>
-            </a:r>
-          </a:p>
-          <a:p>
-            <a:r>
-              <a:rPr lang="fr-FR" sz="2000" dirty="0" err="1"/>
-              <a:t>vai_c_onnx</a:t>
-            </a:r>
-            <a:r>
-              <a:rPr lang="fr-FR" sz="2000" dirty="0"/>
-              <a:t> \</a:t>
-            </a:r>
-          </a:p>
-          <a:p>
-            <a:r>
-              <a:rPr lang="fr-FR" sz="2000" dirty="0"/>
-              <a:t>  --input </a:t>
-            </a:r>
-            <a:r>
-              <a:rPr lang="fr-FR" sz="2000" dirty="0" err="1"/>
-              <a:t>wdbc_quant.onnx</a:t>
-            </a:r>
-            <a:r>
-              <a:rPr lang="fr-FR" sz="2000" dirty="0"/>
-              <a:t> \</a:t>
-            </a:r>
-          </a:p>
-          <a:p>
-            <a:r>
-              <a:rPr lang="fr-FR" sz="2000" dirty="0"/>
-              <a:t>  --</a:t>
-            </a:r>
-            <a:r>
-              <a:rPr lang="fr-FR" sz="2000" dirty="0" err="1"/>
-              <a:t>arch</a:t>
-            </a:r>
-            <a:r>
-              <a:rPr lang="fr-FR" sz="2000" dirty="0"/>
-              <a:t> /</a:t>
-            </a:r>
-            <a:r>
-              <a:rPr lang="fr-FR" sz="2000" dirty="0" err="1"/>
-              <a:t>opt</a:t>
-            </a:r>
-            <a:r>
-              <a:rPr lang="fr-FR" sz="2000" dirty="0"/>
-              <a:t>/</a:t>
-            </a:r>
-            <a:r>
-              <a:rPr lang="fr-FR" sz="2000" dirty="0" err="1"/>
-              <a:t>vitis_ai</a:t>
-            </a:r>
-            <a:r>
-              <a:rPr lang="fr-FR" sz="2000" dirty="0"/>
-              <a:t>/compiler/</a:t>
-            </a:r>
-            <a:r>
-              <a:rPr lang="fr-FR" sz="2000" dirty="0" err="1"/>
-              <a:t>arch</a:t>
-            </a:r>
-            <a:r>
-              <a:rPr lang="fr-FR" sz="2000" dirty="0"/>
-              <a:t>/DPUCZDX8G/ZCU102/</a:t>
-            </a:r>
-            <a:r>
-              <a:rPr lang="fr-FR" sz="2000" dirty="0" err="1"/>
-              <a:t>arch.json</a:t>
-            </a:r>
-            <a:r>
-              <a:rPr lang="fr-FR" sz="2000" dirty="0"/>
-              <a:t> \</a:t>
-            </a:r>
-          </a:p>
-          <a:p>
-            <a:r>
-              <a:rPr lang="fr-FR" sz="2000" dirty="0"/>
-              <a:t>  --</a:t>
-            </a:r>
-            <a:r>
-              <a:rPr lang="fr-FR" sz="2000" dirty="0" err="1"/>
-              <a:t>output_dir</a:t>
-            </a:r>
-            <a:r>
-              <a:rPr lang="fr-FR" sz="2000" dirty="0"/>
-              <a:t> . \</a:t>
-            </a:r>
-          </a:p>
-          <a:p>
-            <a:r>
-              <a:rPr lang="fr-FR" sz="2000" dirty="0"/>
-              <a:t>  --</a:t>
-            </a:r>
-            <a:r>
-              <a:rPr lang="fr-FR" sz="2000" dirty="0" err="1"/>
-              <a:t>net_name</a:t>
-            </a:r>
-            <a:r>
-              <a:rPr lang="fr-FR" sz="2000" dirty="0"/>
-              <a:t> </a:t>
-            </a:r>
-            <a:r>
-              <a:rPr lang="fr-FR" sz="2000" dirty="0" err="1"/>
-              <a:t>wdbc</a:t>
-            </a:r>
-            <a:endParaRPr lang="fr-FR" sz="2000" dirty="0"/>
-          </a:p>
-        </p:txBody>
-      </p:sp>
-    </p:spTree>
-    <p:extLst>
-      <p:ext uri="{BB962C8B-B14F-4D97-AF65-F5344CB8AC3E}">
-        <p14:creationId xmlns:p14="http://schemas.microsoft.com/office/powerpoint/2010/main" val="741439863"/>
-      </p:ext>
-    </p:extLst>
-  </p:cSld>
-  <p:clrMapOvr>
-    <a:masterClrMapping/>
-  </p:clrMapOvr>
-</p:sld>
-</file>
-
-<file path=ppt/slides/slide24.xml><?xml version="1.0" encoding="utf-8"?>
-<p:sld xmlns:a="http://schemas.openxmlformats.org/drawingml/2006/main" xmlns:r="http://schemas.openxmlformats.org/officeDocument/2006/relationships" xmlns:p="http://schemas.openxmlformats.org/presentationml/2006/main">
-  <p:cSld>
-    <p:spTree>
-      <p:nvGrpSpPr>
-        <p:cNvPr id="1" name=""/>
-        <p:cNvGrpSpPr/>
-        <p:nvPr/>
-      </p:nvGrpSpPr>
-      <p:grpSpPr>
-        <a:xfrm>
-          <a:off x="0" y="0"/>
-          <a:ext cx="0" cy="0"/>
-          <a:chOff x="0" y="0"/>
-          <a:chExt cx="0" cy="0"/>
-        </a:xfrm>
-      </p:grpSpPr>
-      <p:sp>
-        <p:nvSpPr>
-          <p:cNvPr id="2" name="Titre 1">
-            <a:extLst>
-              <a:ext uri="{FF2B5EF4-FFF2-40B4-BE49-F238E27FC236}">
-                <a16:creationId xmlns:a16="http://schemas.microsoft.com/office/drawing/2014/main" id="{EA6C9AD1-3BE1-4FFE-54C4-D922DF45D70E}"/>
-              </a:ext>
-            </a:extLst>
-          </p:cNvPr>
-          <p:cNvSpPr>
-            <a:spLocks noGrp="1"/>
-          </p:cNvSpPr>
-          <p:nvPr>
-            <p:ph type="title"/>
-          </p:nvPr>
-        </p:nvSpPr>
-        <p:spPr/>
-        <p:txBody>
-          <a:bodyPr/>
-          <a:lstStyle/>
-          <a:p>
-            <a:endParaRPr lang="fr-FR"/>
-          </a:p>
-        </p:txBody>
-      </p:sp>
-      <p:sp>
-        <p:nvSpPr>
-          <p:cNvPr id="3" name="Espace réservé du contenu 2">
-            <a:extLst>
-              <a:ext uri="{FF2B5EF4-FFF2-40B4-BE49-F238E27FC236}">
-                <a16:creationId xmlns:a16="http://schemas.microsoft.com/office/drawing/2014/main" id="{FCF528D6-C58D-10F7-8DDB-2E57C8BD0524}"/>
-              </a:ext>
-            </a:extLst>
-          </p:cNvPr>
-          <p:cNvSpPr>
-            <a:spLocks noGrp="1"/>
-          </p:cNvSpPr>
-          <p:nvPr>
-            <p:ph idx="1"/>
-          </p:nvPr>
-        </p:nvSpPr>
-        <p:spPr/>
-        <p:txBody>
-          <a:bodyPr/>
-          <a:lstStyle/>
-          <a:p>
-            <a:r>
-              <a:rPr lang="fr-FR" dirty="0"/>
-              <a:t># Vitis AI fournit un simulateur du DPU </a:t>
-            </a:r>
-            <a:r>
-              <a:rPr lang="fr-FR" dirty="0" err="1"/>
-              <a:t>xdputil</a:t>
-            </a:r>
-            <a:r>
-              <a:rPr lang="fr-FR" dirty="0"/>
-              <a:t> benchmark </a:t>
-            </a:r>
-            <a:r>
-              <a:rPr lang="fr-FR" dirty="0" err="1"/>
-              <a:t>wdbc.xmodel</a:t>
-            </a:r>
-            <a:r>
-              <a:rPr lang="fr-FR" dirty="0"/>
-              <a:t> -i 1000</a:t>
-            </a:r>
-          </a:p>
-        </p:txBody>
-      </p:sp>
-    </p:spTree>
-    <p:extLst>
-      <p:ext uri="{BB962C8B-B14F-4D97-AF65-F5344CB8AC3E}">
-        <p14:creationId xmlns:p14="http://schemas.microsoft.com/office/powerpoint/2010/main" val="2079497255"/>
+        <p14:creationId xmlns:p14="http://schemas.microsoft.com/office/powerpoint/2010/main" val="2810064803"/>
       </p:ext>
     </p:extLst>
   </p:cSld>

--- a/ppt/IoTAI31-FPGA.pptx
+++ b/ppt/IoTAI31-FPGA.pptx
@@ -5,10 +5,10 @@
     <p:sldMasterId id="2147483653" r:id="rId1"/>
   </p:sldMasterIdLst>
   <p:notesMasterIdLst>
-    <p:notesMasterId r:id="rId23"/>
+    <p:notesMasterId r:id="rId24"/>
   </p:notesMasterIdLst>
   <p:handoutMasterIdLst>
-    <p:handoutMasterId r:id="rId24"/>
+    <p:handoutMasterId r:id="rId25"/>
   </p:handoutMasterIdLst>
   <p:sldIdLst>
     <p:sldId id="264" r:id="rId2"/>
@@ -30,8 +30,9 @@
     <p:sldId id="282" r:id="rId18"/>
     <p:sldId id="272" r:id="rId19"/>
     <p:sldId id="287" r:id="rId20"/>
-    <p:sldId id="286" r:id="rId21"/>
-    <p:sldId id="288" r:id="rId22"/>
+    <p:sldId id="289" r:id="rId21"/>
+    <p:sldId id="286" r:id="rId22"/>
+    <p:sldId id="288" r:id="rId23"/>
   </p:sldIdLst>
   <p:sldSz cx="9144000" cy="6858000" type="screen4x3"/>
   <p:notesSz cx="6648450" cy="9782175"/>
@@ -4000,7 +4001,7 @@
             <a:pPr lvl="1"/>
             <a:r>
               <a:rPr lang="fr-FR" dirty="0"/>
-              <a:t>Conversion en HLS configurables</a:t>
+              <a:t>Conversion en HLS configurable</a:t>
             </a:r>
           </a:p>
         </p:txBody>
@@ -5336,6 +5337,116 @@
           <p:cNvPr id="2" name="Titre 1">
             <a:extLst>
               <a:ext uri="{FF2B5EF4-FFF2-40B4-BE49-F238E27FC236}">
+                <a16:creationId xmlns:a16="http://schemas.microsoft.com/office/drawing/2014/main" id="{74E89B53-84E1-506B-EE91-BEF5F6171C8B}"/>
+              </a:ext>
+            </a:extLst>
+          </p:cNvPr>
+          <p:cNvSpPr>
+            <a:spLocks noGrp="1"/>
+          </p:cNvSpPr>
+          <p:nvPr>
+            <p:ph type="title"/>
+          </p:nvPr>
+        </p:nvSpPr>
+        <p:spPr/>
+        <p:txBody>
+          <a:bodyPr/>
+          <a:lstStyle/>
+          <a:p>
+            <a:r>
+              <a:rPr lang="fr-FR" dirty="0"/>
+              <a:t>DPU</a:t>
+            </a:r>
+          </a:p>
+        </p:txBody>
+      </p:sp>
+      <p:sp>
+        <p:nvSpPr>
+          <p:cNvPr id="3" name="Espace réservé du contenu 2">
+            <a:extLst>
+              <a:ext uri="{FF2B5EF4-FFF2-40B4-BE49-F238E27FC236}">
+                <a16:creationId xmlns:a16="http://schemas.microsoft.com/office/drawing/2014/main" id="{06CB70EA-CF77-1DEE-0F27-A372C3BF65EA}"/>
+              </a:ext>
+            </a:extLst>
+          </p:cNvPr>
+          <p:cNvSpPr>
+            <a:spLocks noGrp="1"/>
+          </p:cNvSpPr>
+          <p:nvPr>
+            <p:ph idx="1"/>
+          </p:nvPr>
+        </p:nvSpPr>
+        <p:spPr/>
+        <p:txBody>
+          <a:bodyPr/>
+          <a:lstStyle/>
+          <a:p>
+            <a:r>
+              <a:rPr lang="fr-FR" dirty="0"/>
+              <a:t>Les NPU ne sont pas utilisé en FPGA</a:t>
+            </a:r>
+          </a:p>
+          <a:p>
+            <a:pPr lvl="1"/>
+            <a:r>
+              <a:rPr lang="fr-FR" dirty="0"/>
+              <a:t>Le FPGA EST le DPU</a:t>
+            </a:r>
+          </a:p>
+          <a:p>
+            <a:r>
+              <a:rPr lang="fr-FR" dirty="0"/>
+              <a:t>Le DTU est très utilisé</a:t>
+            </a:r>
+          </a:p>
+          <a:p>
+            <a:pPr lvl="1"/>
+            <a:r>
+              <a:rPr lang="fr-FR" dirty="0"/>
+              <a:t>Sinon il faut coder </a:t>
+            </a:r>
+            <a:r>
+              <a:rPr lang="fr-FR"/>
+              <a:t>la gestion des données dans le FPGA</a:t>
+            </a:r>
+          </a:p>
+        </p:txBody>
+      </p:sp>
+    </p:spTree>
+    <p:extLst>
+      <p:ext uri="{BB962C8B-B14F-4D97-AF65-F5344CB8AC3E}">
+        <p14:creationId xmlns:p14="http://schemas.microsoft.com/office/powerpoint/2010/main" val="4152081917"/>
+      </p:ext>
+    </p:extLst>
+  </p:cSld>
+  <p:clrMapOvr>
+    <a:masterClrMapping/>
+  </p:clrMapOvr>
+</p:sld>
+</file>
+
+<file path=ppt/slides/slide21.xml><?xml version="1.0" encoding="utf-8"?>
+<p:sld xmlns:a="http://schemas.openxmlformats.org/drawingml/2006/main" xmlns:r="http://schemas.openxmlformats.org/officeDocument/2006/relationships" xmlns:p="http://schemas.openxmlformats.org/presentationml/2006/main">
+  <p:cSld>
+    <p:spTree>
+      <p:nvGrpSpPr>
+        <p:cNvPr id="1" name=""/>
+        <p:cNvGrpSpPr/>
+        <p:nvPr/>
+      </p:nvGrpSpPr>
+      <p:grpSpPr>
+        <a:xfrm>
+          <a:off x="0" y="0"/>
+          <a:ext cx="0" cy="0"/>
+          <a:chOff x="0" y="0"/>
+          <a:chExt cx="0" cy="0"/>
+        </a:xfrm>
+      </p:grpSpPr>
+      <p:sp>
+        <p:nvSpPr>
+          <p:cNvPr id="2" name="Titre 1">
+            <a:extLst>
+              <a:ext uri="{FF2B5EF4-FFF2-40B4-BE49-F238E27FC236}">
                 <a16:creationId xmlns:a16="http://schemas.microsoft.com/office/drawing/2014/main" id="{506A0BD7-841B-A922-8210-66CE6F3B44C8}"/>
               </a:ext>
             </a:extLst>
@@ -5430,7 +5541,7 @@
 </p:sld>
 </file>
 
-<file path=ppt/slides/slide21.xml><?xml version="1.0" encoding="utf-8"?>
+<file path=ppt/slides/slide22.xml><?xml version="1.0" encoding="utf-8"?>
 <p:sld xmlns:a="http://schemas.openxmlformats.org/drawingml/2006/main" xmlns:r="http://schemas.openxmlformats.org/officeDocument/2006/relationships" xmlns:p="http://schemas.openxmlformats.org/presentationml/2006/main">
   <p:cSld>
     <p:spTree>

--- a/ppt/IoTAI31-FPGA.pptx
+++ b/ppt/IoTAI31-FPGA.pptx
@@ -4897,9 +4897,10 @@
           <a:lstStyle/>
           <a:p>
             <a:r>
-              <a:rPr lang="fr-FR" dirty="0"/>
-              <a:t>TP 31</a:t>
-            </a:r>
+              <a:rPr lang="fr-FR"/>
+              <a:t>TP 32</a:t>
+            </a:r>
+            <a:endParaRPr lang="fr-FR" dirty="0"/>
           </a:p>
         </p:txBody>
       </p:sp>
@@ -5581,7 +5582,7 @@
           <a:p>
             <a:r>
               <a:rPr lang="fr-FR" dirty="0"/>
-              <a:t>TP 32</a:t>
+              <a:t>TP 33</a:t>
             </a:r>
           </a:p>
         </p:txBody>

--- a/ppt/IoTAI31-FPGA.pptx
+++ b/ppt/IoTAI31-FPGA.pptx
@@ -6076,6 +6076,14 @@
               <a:rPr lang="fr-FR" dirty="0"/>
               <a:t>Latence et consommation plus faible</a:t>
             </a:r>
+          </a:p>
+          <a:p>
+            <a:pPr lvl="1"/>
+            <a:r>
+              <a:rPr lang="fr-FR"/>
+              <a:t>Parallèlisation possible</a:t>
+            </a:r>
+            <a:endParaRPr lang="fr-FR" dirty="0"/>
           </a:p>
           <a:p>
             <a:pPr lvl="1"/>

--- a/ppt/IoTAI31-FPGA.pptx
+++ b/ppt/IoTAI31-FPGA.pptx
@@ -3778,7 +3778,7 @@
           <a:p>
             <a:r>
               <a:rPr lang="fr-FR" dirty="0"/>
-              <a:t>HLC C++</a:t>
+              <a:t>HLS C++</a:t>
             </a:r>
           </a:p>
         </p:txBody>
@@ -6187,6 +6187,13 @@
             <a:r>
               <a:rPr lang="fr-FR" dirty="0"/>
               <a:t>VHDL</a:t>
+            </a:r>
+          </a:p>
+          <a:p>
+            <a:pPr lvl="1"/>
+            <a:r>
+              <a:rPr lang="fr-FR" dirty="0"/>
+              <a:t>Vitis</a:t>
             </a:r>
           </a:p>
         </p:txBody>
